--- a/downloads/ba-study-deck.pptx
+++ b/downloads/ba-study-deck.pptx
@@ -3203,7 +3203,7 @@
           </a:p>
           <a:p>
             <a:r>
-              <a:t>Independent, free, learning-only student project. Respects every company, tradition, and vendor. Trademarks and sources belong to their owners. Not sold. Concerns are handled by correcting or removing content promptly vi</a:t>
+              <a:t>Independent, free, learning-only student project. Respects every company and vendor. Trademarks belong to their owners. Not affiliated or endorsed. Concerns are removed or corrected promptly via the contact form at https</a:t>
             </a:r>
           </a:p>
         </p:txBody>
@@ -3236,7 +3236,7 @@
               <a:defRPr sz="1200"/>
             </a:pPr>
             <a:r>
-              <a:t>GitHub</a:t>
+              <a:t>Website</a:t>
             </a:r>
           </a:p>
         </p:txBody>
@@ -3269,7 +3269,7 @@
               <a:defRPr sz="1200"/>
             </a:pPr>
             <a:r>
-              <a:t>Website</a:t>
+              <a:t>GitHub</a:t>
             </a:r>
           </a:p>
         </p:txBody>
@@ -3302,7 +3302,7 @@
               <a:defRPr sz="1200"/>
             </a:pPr>
             <a:r>
-              <a:t>X</a:t>
+              <a:t>Profile</a:t>
             </a:r>
           </a:p>
         </p:txBody>
@@ -3335,7 +3335,7 @@
               <a:defRPr sz="1200"/>
             </a:pPr>
             <a:r>
-              <a:t>LinkedIn</a:t>
+              <a:t>X</a:t>
             </a:r>
           </a:p>
         </p:txBody>
@@ -3368,7 +3368,73 @@
               <a:defRPr sz="1200"/>
             </a:pPr>
             <a:r>
+              <a:t>LinkedIn</a:t>
+            </a:r>
+          </a:p>
+        </p:txBody>
+      </p:sp>
+      <p:sp>
+        <p:nvSpPr>
+          <p:cNvPr id="10" name="TextBox 9">
+            <a:hlinkClick r:id="rId7"/>
+          </p:cNvPr>
+          <p:cNvSpPr txBox="1"/>
+          <p:nvPr/>
+        </p:nvSpPr>
+        <p:spPr>
+          <a:xfrm>
+            <a:off x="10972800" y="6355080"/>
+            <a:ext cx="2011680" cy="320040"/>
+          </a:xfrm>
+          <a:prstGeom prst="rect">
+            <a:avLst/>
+          </a:prstGeom>
+          <a:noFill/>
+        </p:spPr>
+        <p:txBody>
+          <a:bodyPr wrap="none">
+            <a:spAutoFit/>
+          </a:bodyPr>
+          <a:lstStyle/>
+          <a:p>
+            <a:pPr>
+              <a:defRPr sz="1200"/>
+            </a:pPr>
+            <a:r>
               <a:t>Hugging Face</a:t>
+            </a:r>
+          </a:p>
+        </p:txBody>
+      </p:sp>
+      <p:sp>
+        <p:nvSpPr>
+          <p:cNvPr id="11" name="TextBox 10">
+            <a:hlinkClick r:id="rId8"/>
+          </p:cNvPr>
+          <p:cNvSpPr txBox="1"/>
+          <p:nvPr/>
+        </p:nvSpPr>
+        <p:spPr>
+          <a:xfrm>
+            <a:off x="13075920" y="6355080"/>
+            <a:ext cx="2011680" cy="320040"/>
+          </a:xfrm>
+          <a:prstGeom prst="rect">
+            <a:avLst/>
+          </a:prstGeom>
+          <a:noFill/>
+        </p:spPr>
+        <p:txBody>
+          <a:bodyPr wrap="none">
+            <a:spAutoFit/>
+          </a:bodyPr>
+          <a:lstStyle/>
+          <a:p>
+            <a:pPr>
+              <a:defRPr sz="1200"/>
+            </a:pPr>
+            <a:r>
+              <a:t>Contact</a:t>
             </a:r>
           </a:p>
         </p:txBody>
@@ -3500,7 +3566,7 @@
           </a:p>
           <a:p>
             <a:r>
-              <a:t>Independent, free, learning-only student project. Respects every company, tradition, and vendor. Trademarks and sources belong to their owners. Not sold. Concerns are handled by correcting or removing content promptly vi</a:t>
+              <a:t>Independent, free, learning-only student project. Respects every company and vendor. Trademarks belong to their owners. Not affiliated or endorsed. Concerns are removed or corrected promptly via the contact form at https</a:t>
             </a:r>
           </a:p>
         </p:txBody>
@@ -3533,7 +3599,7 @@
               <a:defRPr sz="1200"/>
             </a:pPr>
             <a:r>
-              <a:t>GitHub</a:t>
+              <a:t>Website</a:t>
             </a:r>
           </a:p>
         </p:txBody>
@@ -3566,7 +3632,7 @@
               <a:defRPr sz="1200"/>
             </a:pPr>
             <a:r>
-              <a:t>Website</a:t>
+              <a:t>GitHub</a:t>
             </a:r>
           </a:p>
         </p:txBody>
@@ -3599,7 +3665,7 @@
               <a:defRPr sz="1200"/>
             </a:pPr>
             <a:r>
-              <a:t>X</a:t>
+              <a:t>Profile</a:t>
             </a:r>
           </a:p>
         </p:txBody>
@@ -3632,7 +3698,7 @@
               <a:defRPr sz="1200"/>
             </a:pPr>
             <a:r>
-              <a:t>LinkedIn</a:t>
+              <a:t>X</a:t>
             </a:r>
           </a:p>
         </p:txBody>
@@ -3665,7 +3731,73 @@
               <a:defRPr sz="1200"/>
             </a:pPr>
             <a:r>
+              <a:t>LinkedIn</a:t>
+            </a:r>
+          </a:p>
+        </p:txBody>
+      </p:sp>
+      <p:sp>
+        <p:nvSpPr>
+          <p:cNvPr id="10" name="TextBox 9">
+            <a:hlinkClick r:id="rId7"/>
+          </p:cNvPr>
+          <p:cNvSpPr txBox="1"/>
+          <p:nvPr/>
+        </p:nvSpPr>
+        <p:spPr>
+          <a:xfrm>
+            <a:off x="10972800" y="6355080"/>
+            <a:ext cx="2011680" cy="320040"/>
+          </a:xfrm>
+          <a:prstGeom prst="rect">
+            <a:avLst/>
+          </a:prstGeom>
+          <a:noFill/>
+        </p:spPr>
+        <p:txBody>
+          <a:bodyPr wrap="none">
+            <a:spAutoFit/>
+          </a:bodyPr>
+          <a:lstStyle/>
+          <a:p>
+            <a:pPr>
+              <a:defRPr sz="1200"/>
+            </a:pPr>
+            <a:r>
               <a:t>Hugging Face</a:t>
+            </a:r>
+          </a:p>
+        </p:txBody>
+      </p:sp>
+      <p:sp>
+        <p:nvSpPr>
+          <p:cNvPr id="11" name="TextBox 10">
+            <a:hlinkClick r:id="rId8"/>
+          </p:cNvPr>
+          <p:cNvSpPr txBox="1"/>
+          <p:nvPr/>
+        </p:nvSpPr>
+        <p:spPr>
+          <a:xfrm>
+            <a:off x="13075920" y="6355080"/>
+            <a:ext cx="2011680" cy="320040"/>
+          </a:xfrm>
+          <a:prstGeom prst="rect">
+            <a:avLst/>
+          </a:prstGeom>
+          <a:noFill/>
+        </p:spPr>
+        <p:txBody>
+          <a:bodyPr wrap="none">
+            <a:spAutoFit/>
+          </a:bodyPr>
+          <a:lstStyle/>
+          <a:p>
+            <a:pPr>
+              <a:defRPr sz="1200"/>
+            </a:pPr>
+            <a:r>
+              <a:t>Contact</a:t>
             </a:r>
           </a:p>
         </p:txBody>
@@ -3805,7 +3937,7 @@
           </a:p>
           <a:p>
             <a:r>
-              <a:t>Independent, free, learning-only student project. Respects every company, tradition, and vendor. Trademarks and sources belong to their owners. Not sold. Concerns are handled by correcting or removing content promptly vi</a:t>
+              <a:t>Independent, free, learning-only student project. Respects every company and vendor. Trademarks belong to their owners. Not affiliated or endorsed. Concerns are removed or corrected promptly via the contact form at https</a:t>
             </a:r>
           </a:p>
         </p:txBody>
@@ -3838,7 +3970,7 @@
               <a:defRPr sz="1200"/>
             </a:pPr>
             <a:r>
-              <a:t>GitHub</a:t>
+              <a:t>Website</a:t>
             </a:r>
           </a:p>
         </p:txBody>
@@ -3871,7 +4003,7 @@
               <a:defRPr sz="1200"/>
             </a:pPr>
             <a:r>
-              <a:t>Website</a:t>
+              <a:t>GitHub</a:t>
             </a:r>
           </a:p>
         </p:txBody>
@@ -3904,7 +4036,7 @@
               <a:defRPr sz="1200"/>
             </a:pPr>
             <a:r>
-              <a:t>X</a:t>
+              <a:t>Profile</a:t>
             </a:r>
           </a:p>
         </p:txBody>
@@ -3937,7 +4069,7 @@
               <a:defRPr sz="1200"/>
             </a:pPr>
             <a:r>
-              <a:t>LinkedIn</a:t>
+              <a:t>X</a:t>
             </a:r>
           </a:p>
         </p:txBody>
@@ -3970,7 +4102,73 @@
               <a:defRPr sz="1200"/>
             </a:pPr>
             <a:r>
+              <a:t>LinkedIn</a:t>
+            </a:r>
+          </a:p>
+        </p:txBody>
+      </p:sp>
+      <p:sp>
+        <p:nvSpPr>
+          <p:cNvPr id="10" name="TextBox 9">
+            <a:hlinkClick r:id="rId7"/>
+          </p:cNvPr>
+          <p:cNvSpPr txBox="1"/>
+          <p:nvPr/>
+        </p:nvSpPr>
+        <p:spPr>
+          <a:xfrm>
+            <a:off x="10972800" y="6355080"/>
+            <a:ext cx="2011680" cy="320040"/>
+          </a:xfrm>
+          <a:prstGeom prst="rect">
+            <a:avLst/>
+          </a:prstGeom>
+          <a:noFill/>
+        </p:spPr>
+        <p:txBody>
+          <a:bodyPr wrap="none">
+            <a:spAutoFit/>
+          </a:bodyPr>
+          <a:lstStyle/>
+          <a:p>
+            <a:pPr>
+              <a:defRPr sz="1200"/>
+            </a:pPr>
+            <a:r>
               <a:t>Hugging Face</a:t>
+            </a:r>
+          </a:p>
+        </p:txBody>
+      </p:sp>
+      <p:sp>
+        <p:nvSpPr>
+          <p:cNvPr id="11" name="TextBox 10">
+            <a:hlinkClick r:id="rId8"/>
+          </p:cNvPr>
+          <p:cNvSpPr txBox="1"/>
+          <p:nvPr/>
+        </p:nvSpPr>
+        <p:spPr>
+          <a:xfrm>
+            <a:off x="13075920" y="6355080"/>
+            <a:ext cx="2011680" cy="320040"/>
+          </a:xfrm>
+          <a:prstGeom prst="rect">
+            <a:avLst/>
+          </a:prstGeom>
+          <a:noFill/>
+        </p:spPr>
+        <p:txBody>
+          <a:bodyPr wrap="none">
+            <a:spAutoFit/>
+          </a:bodyPr>
+          <a:lstStyle/>
+          <a:p>
+            <a:pPr>
+              <a:defRPr sz="1200"/>
+            </a:pPr>
+            <a:r>
+              <a:t>Contact</a:t>
             </a:r>
           </a:p>
         </p:txBody>
@@ -4102,7 +4300,7 @@
           </a:p>
           <a:p>
             <a:r>
-              <a:t>Independent, free, learning-only student project. Respects every company, tradition, and vendor. Trademarks and sources belong to their owners. Not sold. Concerns are handled by correcting or removing content promptly vi</a:t>
+              <a:t>Independent, free, learning-only student project. Respects every company and vendor. Trademarks belong to their owners. Not affiliated or endorsed. Concerns are removed or corrected promptly via the contact form at https</a:t>
             </a:r>
           </a:p>
         </p:txBody>
@@ -4135,7 +4333,7 @@
               <a:defRPr sz="1200"/>
             </a:pPr>
             <a:r>
-              <a:t>GitHub</a:t>
+              <a:t>Website</a:t>
             </a:r>
           </a:p>
         </p:txBody>
@@ -4168,7 +4366,7 @@
               <a:defRPr sz="1200"/>
             </a:pPr>
             <a:r>
-              <a:t>Website</a:t>
+              <a:t>GitHub</a:t>
             </a:r>
           </a:p>
         </p:txBody>
@@ -4201,7 +4399,7 @@
               <a:defRPr sz="1200"/>
             </a:pPr>
             <a:r>
-              <a:t>X</a:t>
+              <a:t>Profile</a:t>
             </a:r>
           </a:p>
         </p:txBody>
@@ -4234,7 +4432,7 @@
               <a:defRPr sz="1200"/>
             </a:pPr>
             <a:r>
-              <a:t>LinkedIn</a:t>
+              <a:t>X</a:t>
             </a:r>
           </a:p>
         </p:txBody>
@@ -4267,7 +4465,73 @@
               <a:defRPr sz="1200"/>
             </a:pPr>
             <a:r>
+              <a:t>LinkedIn</a:t>
+            </a:r>
+          </a:p>
+        </p:txBody>
+      </p:sp>
+      <p:sp>
+        <p:nvSpPr>
+          <p:cNvPr id="10" name="TextBox 9">
+            <a:hlinkClick r:id="rId7"/>
+          </p:cNvPr>
+          <p:cNvSpPr txBox="1"/>
+          <p:nvPr/>
+        </p:nvSpPr>
+        <p:spPr>
+          <a:xfrm>
+            <a:off x="10972800" y="6355080"/>
+            <a:ext cx="2011680" cy="320040"/>
+          </a:xfrm>
+          <a:prstGeom prst="rect">
+            <a:avLst/>
+          </a:prstGeom>
+          <a:noFill/>
+        </p:spPr>
+        <p:txBody>
+          <a:bodyPr wrap="none">
+            <a:spAutoFit/>
+          </a:bodyPr>
+          <a:lstStyle/>
+          <a:p>
+            <a:pPr>
+              <a:defRPr sz="1200"/>
+            </a:pPr>
+            <a:r>
               <a:t>Hugging Face</a:t>
+            </a:r>
+          </a:p>
+        </p:txBody>
+      </p:sp>
+      <p:sp>
+        <p:nvSpPr>
+          <p:cNvPr id="11" name="TextBox 10">
+            <a:hlinkClick r:id="rId8"/>
+          </p:cNvPr>
+          <p:cNvSpPr txBox="1"/>
+          <p:nvPr/>
+        </p:nvSpPr>
+        <p:spPr>
+          <a:xfrm>
+            <a:off x="13075920" y="6355080"/>
+            <a:ext cx="2011680" cy="320040"/>
+          </a:xfrm>
+          <a:prstGeom prst="rect">
+            <a:avLst/>
+          </a:prstGeom>
+          <a:noFill/>
+        </p:spPr>
+        <p:txBody>
+          <a:bodyPr wrap="none">
+            <a:spAutoFit/>
+          </a:bodyPr>
+          <a:lstStyle/>
+          <a:p>
+            <a:pPr>
+              <a:defRPr sz="1200"/>
+            </a:pPr>
+            <a:r>
+              <a:t>Contact</a:t>
             </a:r>
           </a:p>
         </p:txBody>
@@ -4399,7 +4663,7 @@
           </a:p>
           <a:p>
             <a:r>
-              <a:t>Independent, free, learning-only student project. Respects every company, tradition, and vendor. Trademarks and sources belong to their owners. Not sold. Concerns are handled by correcting or removing content promptly vi</a:t>
+              <a:t>Independent, free, learning-only student project. Respects every company and vendor. Trademarks belong to their owners. Not affiliated or endorsed. Concerns are removed or corrected promptly via the contact form at https</a:t>
             </a:r>
           </a:p>
         </p:txBody>
@@ -4432,7 +4696,7 @@
               <a:defRPr sz="1200"/>
             </a:pPr>
             <a:r>
-              <a:t>GitHub</a:t>
+              <a:t>Website</a:t>
             </a:r>
           </a:p>
         </p:txBody>
@@ -4465,7 +4729,7 @@
               <a:defRPr sz="1200"/>
             </a:pPr>
             <a:r>
-              <a:t>Website</a:t>
+              <a:t>GitHub</a:t>
             </a:r>
           </a:p>
         </p:txBody>
@@ -4498,7 +4762,7 @@
               <a:defRPr sz="1200"/>
             </a:pPr>
             <a:r>
-              <a:t>X</a:t>
+              <a:t>Profile</a:t>
             </a:r>
           </a:p>
         </p:txBody>
@@ -4531,7 +4795,7 @@
               <a:defRPr sz="1200"/>
             </a:pPr>
             <a:r>
-              <a:t>LinkedIn</a:t>
+              <a:t>X</a:t>
             </a:r>
           </a:p>
         </p:txBody>
@@ -4564,7 +4828,73 @@
               <a:defRPr sz="1200"/>
             </a:pPr>
             <a:r>
+              <a:t>LinkedIn</a:t>
+            </a:r>
+          </a:p>
+        </p:txBody>
+      </p:sp>
+      <p:sp>
+        <p:nvSpPr>
+          <p:cNvPr id="10" name="TextBox 9">
+            <a:hlinkClick r:id="rId7"/>
+          </p:cNvPr>
+          <p:cNvSpPr txBox="1"/>
+          <p:nvPr/>
+        </p:nvSpPr>
+        <p:spPr>
+          <a:xfrm>
+            <a:off x="10972800" y="6355080"/>
+            <a:ext cx="2011680" cy="320040"/>
+          </a:xfrm>
+          <a:prstGeom prst="rect">
+            <a:avLst/>
+          </a:prstGeom>
+          <a:noFill/>
+        </p:spPr>
+        <p:txBody>
+          <a:bodyPr wrap="none">
+            <a:spAutoFit/>
+          </a:bodyPr>
+          <a:lstStyle/>
+          <a:p>
+            <a:pPr>
+              <a:defRPr sz="1200"/>
+            </a:pPr>
+            <a:r>
               <a:t>Hugging Face</a:t>
+            </a:r>
+          </a:p>
+        </p:txBody>
+      </p:sp>
+      <p:sp>
+        <p:nvSpPr>
+          <p:cNvPr id="11" name="TextBox 10">
+            <a:hlinkClick r:id="rId8"/>
+          </p:cNvPr>
+          <p:cNvSpPr txBox="1"/>
+          <p:nvPr/>
+        </p:nvSpPr>
+        <p:spPr>
+          <a:xfrm>
+            <a:off x="13075920" y="6355080"/>
+            <a:ext cx="2011680" cy="320040"/>
+          </a:xfrm>
+          <a:prstGeom prst="rect">
+            <a:avLst/>
+          </a:prstGeom>
+          <a:noFill/>
+        </p:spPr>
+        <p:txBody>
+          <a:bodyPr wrap="none">
+            <a:spAutoFit/>
+          </a:bodyPr>
+          <a:lstStyle/>
+          <a:p>
+            <a:pPr>
+              <a:defRPr sz="1200"/>
+            </a:pPr>
+            <a:r>
+              <a:t>Contact</a:t>
             </a:r>
           </a:p>
         </p:txBody>
@@ -4696,7 +5026,7 @@
           </a:p>
           <a:p>
             <a:r>
-              <a:t>Independent, free, learning-only student project. Respects every company, tradition, and vendor. Trademarks and sources belong to their owners. Not sold. Concerns are handled by correcting or removing content promptly vi</a:t>
+              <a:t>Independent, free, learning-only student project. Respects every company and vendor. Trademarks belong to their owners. Not affiliated or endorsed. Concerns are removed or corrected promptly via the contact form at https</a:t>
             </a:r>
           </a:p>
         </p:txBody>
@@ -4729,7 +5059,7 @@
               <a:defRPr sz="1200"/>
             </a:pPr>
             <a:r>
-              <a:t>GitHub</a:t>
+              <a:t>Website</a:t>
             </a:r>
           </a:p>
         </p:txBody>
@@ -4762,7 +5092,7 @@
               <a:defRPr sz="1200"/>
             </a:pPr>
             <a:r>
-              <a:t>Website</a:t>
+              <a:t>GitHub</a:t>
             </a:r>
           </a:p>
         </p:txBody>
@@ -4795,7 +5125,7 @@
               <a:defRPr sz="1200"/>
             </a:pPr>
             <a:r>
-              <a:t>X</a:t>
+              <a:t>Profile</a:t>
             </a:r>
           </a:p>
         </p:txBody>
@@ -4828,7 +5158,7 @@
               <a:defRPr sz="1200"/>
             </a:pPr>
             <a:r>
-              <a:t>LinkedIn</a:t>
+              <a:t>X</a:t>
             </a:r>
           </a:p>
         </p:txBody>
@@ -4861,7 +5191,73 @@
               <a:defRPr sz="1200"/>
             </a:pPr>
             <a:r>
+              <a:t>LinkedIn</a:t>
+            </a:r>
+          </a:p>
+        </p:txBody>
+      </p:sp>
+      <p:sp>
+        <p:nvSpPr>
+          <p:cNvPr id="10" name="TextBox 9">
+            <a:hlinkClick r:id="rId7"/>
+          </p:cNvPr>
+          <p:cNvSpPr txBox="1"/>
+          <p:nvPr/>
+        </p:nvSpPr>
+        <p:spPr>
+          <a:xfrm>
+            <a:off x="10972800" y="6355080"/>
+            <a:ext cx="2011680" cy="320040"/>
+          </a:xfrm>
+          <a:prstGeom prst="rect">
+            <a:avLst/>
+          </a:prstGeom>
+          <a:noFill/>
+        </p:spPr>
+        <p:txBody>
+          <a:bodyPr wrap="none">
+            <a:spAutoFit/>
+          </a:bodyPr>
+          <a:lstStyle/>
+          <a:p>
+            <a:pPr>
+              <a:defRPr sz="1200"/>
+            </a:pPr>
+            <a:r>
               <a:t>Hugging Face</a:t>
+            </a:r>
+          </a:p>
+        </p:txBody>
+      </p:sp>
+      <p:sp>
+        <p:nvSpPr>
+          <p:cNvPr id="11" name="TextBox 10">
+            <a:hlinkClick r:id="rId8"/>
+          </p:cNvPr>
+          <p:cNvSpPr txBox="1"/>
+          <p:nvPr/>
+        </p:nvSpPr>
+        <p:spPr>
+          <a:xfrm>
+            <a:off x="13075920" y="6355080"/>
+            <a:ext cx="2011680" cy="320040"/>
+          </a:xfrm>
+          <a:prstGeom prst="rect">
+            <a:avLst/>
+          </a:prstGeom>
+          <a:noFill/>
+        </p:spPr>
+        <p:txBody>
+          <a:bodyPr wrap="none">
+            <a:spAutoFit/>
+          </a:bodyPr>
+          <a:lstStyle/>
+          <a:p>
+            <a:pPr>
+              <a:defRPr sz="1200"/>
+            </a:pPr>
+            <a:r>
+              <a:t>Contact</a:t>
             </a:r>
           </a:p>
         </p:txBody>
@@ -4993,7 +5389,7 @@
           </a:p>
           <a:p>
             <a:r>
-              <a:t>Independent, free, learning-only student project. Respects every company, tradition, and vendor. Trademarks and sources belong to their owners. Not sold. Concerns are handled by correcting or removing content promptly vi</a:t>
+              <a:t>Independent, free, learning-only student project. Respects every company and vendor. Trademarks belong to their owners. Not affiliated or endorsed. Concerns are removed or corrected promptly via the contact form at https</a:t>
             </a:r>
           </a:p>
         </p:txBody>
@@ -5026,7 +5422,7 @@
               <a:defRPr sz="1200"/>
             </a:pPr>
             <a:r>
-              <a:t>GitHub</a:t>
+              <a:t>Website</a:t>
             </a:r>
           </a:p>
         </p:txBody>
@@ -5059,7 +5455,7 @@
               <a:defRPr sz="1200"/>
             </a:pPr>
             <a:r>
-              <a:t>Website</a:t>
+              <a:t>GitHub</a:t>
             </a:r>
           </a:p>
         </p:txBody>
@@ -5092,7 +5488,7 @@
               <a:defRPr sz="1200"/>
             </a:pPr>
             <a:r>
-              <a:t>X</a:t>
+              <a:t>Profile</a:t>
             </a:r>
           </a:p>
         </p:txBody>
@@ -5125,7 +5521,7 @@
               <a:defRPr sz="1200"/>
             </a:pPr>
             <a:r>
-              <a:t>LinkedIn</a:t>
+              <a:t>X</a:t>
             </a:r>
           </a:p>
         </p:txBody>
@@ -5158,7 +5554,73 @@
               <a:defRPr sz="1200"/>
             </a:pPr>
             <a:r>
+              <a:t>LinkedIn</a:t>
+            </a:r>
+          </a:p>
+        </p:txBody>
+      </p:sp>
+      <p:sp>
+        <p:nvSpPr>
+          <p:cNvPr id="10" name="TextBox 9">
+            <a:hlinkClick r:id="rId7"/>
+          </p:cNvPr>
+          <p:cNvSpPr txBox="1"/>
+          <p:nvPr/>
+        </p:nvSpPr>
+        <p:spPr>
+          <a:xfrm>
+            <a:off x="10972800" y="6355080"/>
+            <a:ext cx="2011680" cy="320040"/>
+          </a:xfrm>
+          <a:prstGeom prst="rect">
+            <a:avLst/>
+          </a:prstGeom>
+          <a:noFill/>
+        </p:spPr>
+        <p:txBody>
+          <a:bodyPr wrap="none">
+            <a:spAutoFit/>
+          </a:bodyPr>
+          <a:lstStyle/>
+          <a:p>
+            <a:pPr>
+              <a:defRPr sz="1200"/>
+            </a:pPr>
+            <a:r>
               <a:t>Hugging Face</a:t>
+            </a:r>
+          </a:p>
+        </p:txBody>
+      </p:sp>
+      <p:sp>
+        <p:nvSpPr>
+          <p:cNvPr id="11" name="TextBox 10">
+            <a:hlinkClick r:id="rId8"/>
+          </p:cNvPr>
+          <p:cNvSpPr txBox="1"/>
+          <p:nvPr/>
+        </p:nvSpPr>
+        <p:spPr>
+          <a:xfrm>
+            <a:off x="13075920" y="6355080"/>
+            <a:ext cx="2011680" cy="320040"/>
+          </a:xfrm>
+          <a:prstGeom prst="rect">
+            <a:avLst/>
+          </a:prstGeom>
+          <a:noFill/>
+        </p:spPr>
+        <p:txBody>
+          <a:bodyPr wrap="none">
+            <a:spAutoFit/>
+          </a:bodyPr>
+          <a:lstStyle/>
+          <a:p>
+            <a:pPr>
+              <a:defRPr sz="1200"/>
+            </a:pPr>
+            <a:r>
+              <a:t>Contact</a:t>
             </a:r>
           </a:p>
         </p:txBody>

--- a/downloads/ba-study-deck.pptx
+++ b/downloads/ba-study-deck.pptx
@@ -3307,138 +3307,6 @@
           </a:p>
         </p:txBody>
       </p:sp>
-      <p:sp>
-        <p:nvSpPr>
-          <p:cNvPr id="8" name="TextBox 7">
-            <a:hlinkClick r:id="rId5"/>
-          </p:cNvPr>
-          <p:cNvSpPr txBox="1"/>
-          <p:nvPr/>
-        </p:nvSpPr>
-        <p:spPr>
-          <a:xfrm>
-            <a:off x="6766560" y="6355080"/>
-            <a:ext cx="2011680" cy="320040"/>
-          </a:xfrm>
-          <a:prstGeom prst="rect">
-            <a:avLst/>
-          </a:prstGeom>
-          <a:noFill/>
-        </p:spPr>
-        <p:txBody>
-          <a:bodyPr wrap="none">
-            <a:spAutoFit/>
-          </a:bodyPr>
-          <a:lstStyle/>
-          <a:p>
-            <a:pPr>
-              <a:defRPr sz="1200"/>
-            </a:pPr>
-            <a:r>
-              <a:t>X</a:t>
-            </a:r>
-          </a:p>
-        </p:txBody>
-      </p:sp>
-      <p:sp>
-        <p:nvSpPr>
-          <p:cNvPr id="9" name="TextBox 8">
-            <a:hlinkClick r:id="rId6"/>
-          </p:cNvPr>
-          <p:cNvSpPr txBox="1"/>
-          <p:nvPr/>
-        </p:nvSpPr>
-        <p:spPr>
-          <a:xfrm>
-            <a:off x="8869680" y="6355080"/>
-            <a:ext cx="2011680" cy="320040"/>
-          </a:xfrm>
-          <a:prstGeom prst="rect">
-            <a:avLst/>
-          </a:prstGeom>
-          <a:noFill/>
-        </p:spPr>
-        <p:txBody>
-          <a:bodyPr wrap="none">
-            <a:spAutoFit/>
-          </a:bodyPr>
-          <a:lstStyle/>
-          <a:p>
-            <a:pPr>
-              <a:defRPr sz="1200"/>
-            </a:pPr>
-            <a:r>
-              <a:t>LinkedIn</a:t>
-            </a:r>
-          </a:p>
-        </p:txBody>
-      </p:sp>
-      <p:sp>
-        <p:nvSpPr>
-          <p:cNvPr id="10" name="TextBox 9">
-            <a:hlinkClick r:id="rId7"/>
-          </p:cNvPr>
-          <p:cNvSpPr txBox="1"/>
-          <p:nvPr/>
-        </p:nvSpPr>
-        <p:spPr>
-          <a:xfrm>
-            <a:off x="10972800" y="6355080"/>
-            <a:ext cx="2011680" cy="320040"/>
-          </a:xfrm>
-          <a:prstGeom prst="rect">
-            <a:avLst/>
-          </a:prstGeom>
-          <a:noFill/>
-        </p:spPr>
-        <p:txBody>
-          <a:bodyPr wrap="none">
-            <a:spAutoFit/>
-          </a:bodyPr>
-          <a:lstStyle/>
-          <a:p>
-            <a:pPr>
-              <a:defRPr sz="1200"/>
-            </a:pPr>
-            <a:r>
-              <a:t>Hugging Face</a:t>
-            </a:r>
-          </a:p>
-        </p:txBody>
-      </p:sp>
-      <p:sp>
-        <p:nvSpPr>
-          <p:cNvPr id="11" name="TextBox 10">
-            <a:hlinkClick r:id="rId8"/>
-          </p:cNvPr>
-          <p:cNvSpPr txBox="1"/>
-          <p:nvPr/>
-        </p:nvSpPr>
-        <p:spPr>
-          <a:xfrm>
-            <a:off x="13075920" y="6355080"/>
-            <a:ext cx="2011680" cy="320040"/>
-          </a:xfrm>
-          <a:prstGeom prst="rect">
-            <a:avLst/>
-          </a:prstGeom>
-          <a:noFill/>
-        </p:spPr>
-        <p:txBody>
-          <a:bodyPr wrap="none">
-            <a:spAutoFit/>
-          </a:bodyPr>
-          <a:lstStyle/>
-          <a:p>
-            <a:pPr>
-              <a:defRPr sz="1200"/>
-            </a:pPr>
-            <a:r>
-              <a:t>Contact</a:t>
-            </a:r>
-          </a:p>
-        </p:txBody>
-      </p:sp>
     </p:spTree>
   </p:cSld>
   <p:clrMapOvr>
@@ -3670,138 +3538,6 @@
           </a:p>
         </p:txBody>
       </p:sp>
-      <p:sp>
-        <p:nvSpPr>
-          <p:cNvPr id="8" name="TextBox 7">
-            <a:hlinkClick r:id="rId5"/>
-          </p:cNvPr>
-          <p:cNvSpPr txBox="1"/>
-          <p:nvPr/>
-        </p:nvSpPr>
-        <p:spPr>
-          <a:xfrm>
-            <a:off x="6766560" y="6355080"/>
-            <a:ext cx="2011680" cy="320040"/>
-          </a:xfrm>
-          <a:prstGeom prst="rect">
-            <a:avLst/>
-          </a:prstGeom>
-          <a:noFill/>
-        </p:spPr>
-        <p:txBody>
-          <a:bodyPr wrap="none">
-            <a:spAutoFit/>
-          </a:bodyPr>
-          <a:lstStyle/>
-          <a:p>
-            <a:pPr>
-              <a:defRPr sz="1200"/>
-            </a:pPr>
-            <a:r>
-              <a:t>X</a:t>
-            </a:r>
-          </a:p>
-        </p:txBody>
-      </p:sp>
-      <p:sp>
-        <p:nvSpPr>
-          <p:cNvPr id="9" name="TextBox 8">
-            <a:hlinkClick r:id="rId6"/>
-          </p:cNvPr>
-          <p:cNvSpPr txBox="1"/>
-          <p:nvPr/>
-        </p:nvSpPr>
-        <p:spPr>
-          <a:xfrm>
-            <a:off x="8869680" y="6355080"/>
-            <a:ext cx="2011680" cy="320040"/>
-          </a:xfrm>
-          <a:prstGeom prst="rect">
-            <a:avLst/>
-          </a:prstGeom>
-          <a:noFill/>
-        </p:spPr>
-        <p:txBody>
-          <a:bodyPr wrap="none">
-            <a:spAutoFit/>
-          </a:bodyPr>
-          <a:lstStyle/>
-          <a:p>
-            <a:pPr>
-              <a:defRPr sz="1200"/>
-            </a:pPr>
-            <a:r>
-              <a:t>LinkedIn</a:t>
-            </a:r>
-          </a:p>
-        </p:txBody>
-      </p:sp>
-      <p:sp>
-        <p:nvSpPr>
-          <p:cNvPr id="10" name="TextBox 9">
-            <a:hlinkClick r:id="rId7"/>
-          </p:cNvPr>
-          <p:cNvSpPr txBox="1"/>
-          <p:nvPr/>
-        </p:nvSpPr>
-        <p:spPr>
-          <a:xfrm>
-            <a:off x="10972800" y="6355080"/>
-            <a:ext cx="2011680" cy="320040"/>
-          </a:xfrm>
-          <a:prstGeom prst="rect">
-            <a:avLst/>
-          </a:prstGeom>
-          <a:noFill/>
-        </p:spPr>
-        <p:txBody>
-          <a:bodyPr wrap="none">
-            <a:spAutoFit/>
-          </a:bodyPr>
-          <a:lstStyle/>
-          <a:p>
-            <a:pPr>
-              <a:defRPr sz="1200"/>
-            </a:pPr>
-            <a:r>
-              <a:t>Hugging Face</a:t>
-            </a:r>
-          </a:p>
-        </p:txBody>
-      </p:sp>
-      <p:sp>
-        <p:nvSpPr>
-          <p:cNvPr id="11" name="TextBox 10">
-            <a:hlinkClick r:id="rId8"/>
-          </p:cNvPr>
-          <p:cNvSpPr txBox="1"/>
-          <p:nvPr/>
-        </p:nvSpPr>
-        <p:spPr>
-          <a:xfrm>
-            <a:off x="13075920" y="6355080"/>
-            <a:ext cx="2011680" cy="320040"/>
-          </a:xfrm>
-          <a:prstGeom prst="rect">
-            <a:avLst/>
-          </a:prstGeom>
-          <a:noFill/>
-        </p:spPr>
-        <p:txBody>
-          <a:bodyPr wrap="none">
-            <a:spAutoFit/>
-          </a:bodyPr>
-          <a:lstStyle/>
-          <a:p>
-            <a:pPr>
-              <a:defRPr sz="1200"/>
-            </a:pPr>
-            <a:r>
-              <a:t>Contact</a:t>
-            </a:r>
-          </a:p>
-        </p:txBody>
-      </p:sp>
     </p:spTree>
   </p:cSld>
   <p:clrMapOvr>
@@ -4041,138 +3777,6 @@
           </a:p>
         </p:txBody>
       </p:sp>
-      <p:sp>
-        <p:nvSpPr>
-          <p:cNvPr id="8" name="TextBox 7">
-            <a:hlinkClick r:id="rId5"/>
-          </p:cNvPr>
-          <p:cNvSpPr txBox="1"/>
-          <p:nvPr/>
-        </p:nvSpPr>
-        <p:spPr>
-          <a:xfrm>
-            <a:off x="6766560" y="6355080"/>
-            <a:ext cx="2011680" cy="320040"/>
-          </a:xfrm>
-          <a:prstGeom prst="rect">
-            <a:avLst/>
-          </a:prstGeom>
-          <a:noFill/>
-        </p:spPr>
-        <p:txBody>
-          <a:bodyPr wrap="none">
-            <a:spAutoFit/>
-          </a:bodyPr>
-          <a:lstStyle/>
-          <a:p>
-            <a:pPr>
-              <a:defRPr sz="1200"/>
-            </a:pPr>
-            <a:r>
-              <a:t>X</a:t>
-            </a:r>
-          </a:p>
-        </p:txBody>
-      </p:sp>
-      <p:sp>
-        <p:nvSpPr>
-          <p:cNvPr id="9" name="TextBox 8">
-            <a:hlinkClick r:id="rId6"/>
-          </p:cNvPr>
-          <p:cNvSpPr txBox="1"/>
-          <p:nvPr/>
-        </p:nvSpPr>
-        <p:spPr>
-          <a:xfrm>
-            <a:off x="8869680" y="6355080"/>
-            <a:ext cx="2011680" cy="320040"/>
-          </a:xfrm>
-          <a:prstGeom prst="rect">
-            <a:avLst/>
-          </a:prstGeom>
-          <a:noFill/>
-        </p:spPr>
-        <p:txBody>
-          <a:bodyPr wrap="none">
-            <a:spAutoFit/>
-          </a:bodyPr>
-          <a:lstStyle/>
-          <a:p>
-            <a:pPr>
-              <a:defRPr sz="1200"/>
-            </a:pPr>
-            <a:r>
-              <a:t>LinkedIn</a:t>
-            </a:r>
-          </a:p>
-        </p:txBody>
-      </p:sp>
-      <p:sp>
-        <p:nvSpPr>
-          <p:cNvPr id="10" name="TextBox 9">
-            <a:hlinkClick r:id="rId7"/>
-          </p:cNvPr>
-          <p:cNvSpPr txBox="1"/>
-          <p:nvPr/>
-        </p:nvSpPr>
-        <p:spPr>
-          <a:xfrm>
-            <a:off x="10972800" y="6355080"/>
-            <a:ext cx="2011680" cy="320040"/>
-          </a:xfrm>
-          <a:prstGeom prst="rect">
-            <a:avLst/>
-          </a:prstGeom>
-          <a:noFill/>
-        </p:spPr>
-        <p:txBody>
-          <a:bodyPr wrap="none">
-            <a:spAutoFit/>
-          </a:bodyPr>
-          <a:lstStyle/>
-          <a:p>
-            <a:pPr>
-              <a:defRPr sz="1200"/>
-            </a:pPr>
-            <a:r>
-              <a:t>Hugging Face</a:t>
-            </a:r>
-          </a:p>
-        </p:txBody>
-      </p:sp>
-      <p:sp>
-        <p:nvSpPr>
-          <p:cNvPr id="11" name="TextBox 10">
-            <a:hlinkClick r:id="rId8"/>
-          </p:cNvPr>
-          <p:cNvSpPr txBox="1"/>
-          <p:nvPr/>
-        </p:nvSpPr>
-        <p:spPr>
-          <a:xfrm>
-            <a:off x="13075920" y="6355080"/>
-            <a:ext cx="2011680" cy="320040"/>
-          </a:xfrm>
-          <a:prstGeom prst="rect">
-            <a:avLst/>
-          </a:prstGeom>
-          <a:noFill/>
-        </p:spPr>
-        <p:txBody>
-          <a:bodyPr wrap="none">
-            <a:spAutoFit/>
-          </a:bodyPr>
-          <a:lstStyle/>
-          <a:p>
-            <a:pPr>
-              <a:defRPr sz="1200"/>
-            </a:pPr>
-            <a:r>
-              <a:t>Contact</a:t>
-            </a:r>
-          </a:p>
-        </p:txBody>
-      </p:sp>
     </p:spTree>
   </p:cSld>
   <p:clrMapOvr>
@@ -4404,138 +4008,6 @@
           </a:p>
         </p:txBody>
       </p:sp>
-      <p:sp>
-        <p:nvSpPr>
-          <p:cNvPr id="8" name="TextBox 7">
-            <a:hlinkClick r:id="rId5"/>
-          </p:cNvPr>
-          <p:cNvSpPr txBox="1"/>
-          <p:nvPr/>
-        </p:nvSpPr>
-        <p:spPr>
-          <a:xfrm>
-            <a:off x="6766560" y="6355080"/>
-            <a:ext cx="2011680" cy="320040"/>
-          </a:xfrm>
-          <a:prstGeom prst="rect">
-            <a:avLst/>
-          </a:prstGeom>
-          <a:noFill/>
-        </p:spPr>
-        <p:txBody>
-          <a:bodyPr wrap="none">
-            <a:spAutoFit/>
-          </a:bodyPr>
-          <a:lstStyle/>
-          <a:p>
-            <a:pPr>
-              <a:defRPr sz="1200"/>
-            </a:pPr>
-            <a:r>
-              <a:t>X</a:t>
-            </a:r>
-          </a:p>
-        </p:txBody>
-      </p:sp>
-      <p:sp>
-        <p:nvSpPr>
-          <p:cNvPr id="9" name="TextBox 8">
-            <a:hlinkClick r:id="rId6"/>
-          </p:cNvPr>
-          <p:cNvSpPr txBox="1"/>
-          <p:nvPr/>
-        </p:nvSpPr>
-        <p:spPr>
-          <a:xfrm>
-            <a:off x="8869680" y="6355080"/>
-            <a:ext cx="2011680" cy="320040"/>
-          </a:xfrm>
-          <a:prstGeom prst="rect">
-            <a:avLst/>
-          </a:prstGeom>
-          <a:noFill/>
-        </p:spPr>
-        <p:txBody>
-          <a:bodyPr wrap="none">
-            <a:spAutoFit/>
-          </a:bodyPr>
-          <a:lstStyle/>
-          <a:p>
-            <a:pPr>
-              <a:defRPr sz="1200"/>
-            </a:pPr>
-            <a:r>
-              <a:t>LinkedIn</a:t>
-            </a:r>
-          </a:p>
-        </p:txBody>
-      </p:sp>
-      <p:sp>
-        <p:nvSpPr>
-          <p:cNvPr id="10" name="TextBox 9">
-            <a:hlinkClick r:id="rId7"/>
-          </p:cNvPr>
-          <p:cNvSpPr txBox="1"/>
-          <p:nvPr/>
-        </p:nvSpPr>
-        <p:spPr>
-          <a:xfrm>
-            <a:off x="10972800" y="6355080"/>
-            <a:ext cx="2011680" cy="320040"/>
-          </a:xfrm>
-          <a:prstGeom prst="rect">
-            <a:avLst/>
-          </a:prstGeom>
-          <a:noFill/>
-        </p:spPr>
-        <p:txBody>
-          <a:bodyPr wrap="none">
-            <a:spAutoFit/>
-          </a:bodyPr>
-          <a:lstStyle/>
-          <a:p>
-            <a:pPr>
-              <a:defRPr sz="1200"/>
-            </a:pPr>
-            <a:r>
-              <a:t>Hugging Face</a:t>
-            </a:r>
-          </a:p>
-        </p:txBody>
-      </p:sp>
-      <p:sp>
-        <p:nvSpPr>
-          <p:cNvPr id="11" name="TextBox 10">
-            <a:hlinkClick r:id="rId8"/>
-          </p:cNvPr>
-          <p:cNvSpPr txBox="1"/>
-          <p:nvPr/>
-        </p:nvSpPr>
-        <p:spPr>
-          <a:xfrm>
-            <a:off x="13075920" y="6355080"/>
-            <a:ext cx="2011680" cy="320040"/>
-          </a:xfrm>
-          <a:prstGeom prst="rect">
-            <a:avLst/>
-          </a:prstGeom>
-          <a:noFill/>
-        </p:spPr>
-        <p:txBody>
-          <a:bodyPr wrap="none">
-            <a:spAutoFit/>
-          </a:bodyPr>
-          <a:lstStyle/>
-          <a:p>
-            <a:pPr>
-              <a:defRPr sz="1200"/>
-            </a:pPr>
-            <a:r>
-              <a:t>Contact</a:t>
-            </a:r>
-          </a:p>
-        </p:txBody>
-      </p:sp>
     </p:spTree>
   </p:cSld>
   <p:clrMapOvr>
@@ -4767,138 +4239,6 @@
           </a:p>
         </p:txBody>
       </p:sp>
-      <p:sp>
-        <p:nvSpPr>
-          <p:cNvPr id="8" name="TextBox 7">
-            <a:hlinkClick r:id="rId5"/>
-          </p:cNvPr>
-          <p:cNvSpPr txBox="1"/>
-          <p:nvPr/>
-        </p:nvSpPr>
-        <p:spPr>
-          <a:xfrm>
-            <a:off x="6766560" y="6355080"/>
-            <a:ext cx="2011680" cy="320040"/>
-          </a:xfrm>
-          <a:prstGeom prst="rect">
-            <a:avLst/>
-          </a:prstGeom>
-          <a:noFill/>
-        </p:spPr>
-        <p:txBody>
-          <a:bodyPr wrap="none">
-            <a:spAutoFit/>
-          </a:bodyPr>
-          <a:lstStyle/>
-          <a:p>
-            <a:pPr>
-              <a:defRPr sz="1200"/>
-            </a:pPr>
-            <a:r>
-              <a:t>X</a:t>
-            </a:r>
-          </a:p>
-        </p:txBody>
-      </p:sp>
-      <p:sp>
-        <p:nvSpPr>
-          <p:cNvPr id="9" name="TextBox 8">
-            <a:hlinkClick r:id="rId6"/>
-          </p:cNvPr>
-          <p:cNvSpPr txBox="1"/>
-          <p:nvPr/>
-        </p:nvSpPr>
-        <p:spPr>
-          <a:xfrm>
-            <a:off x="8869680" y="6355080"/>
-            <a:ext cx="2011680" cy="320040"/>
-          </a:xfrm>
-          <a:prstGeom prst="rect">
-            <a:avLst/>
-          </a:prstGeom>
-          <a:noFill/>
-        </p:spPr>
-        <p:txBody>
-          <a:bodyPr wrap="none">
-            <a:spAutoFit/>
-          </a:bodyPr>
-          <a:lstStyle/>
-          <a:p>
-            <a:pPr>
-              <a:defRPr sz="1200"/>
-            </a:pPr>
-            <a:r>
-              <a:t>LinkedIn</a:t>
-            </a:r>
-          </a:p>
-        </p:txBody>
-      </p:sp>
-      <p:sp>
-        <p:nvSpPr>
-          <p:cNvPr id="10" name="TextBox 9">
-            <a:hlinkClick r:id="rId7"/>
-          </p:cNvPr>
-          <p:cNvSpPr txBox="1"/>
-          <p:nvPr/>
-        </p:nvSpPr>
-        <p:spPr>
-          <a:xfrm>
-            <a:off x="10972800" y="6355080"/>
-            <a:ext cx="2011680" cy="320040"/>
-          </a:xfrm>
-          <a:prstGeom prst="rect">
-            <a:avLst/>
-          </a:prstGeom>
-          <a:noFill/>
-        </p:spPr>
-        <p:txBody>
-          <a:bodyPr wrap="none">
-            <a:spAutoFit/>
-          </a:bodyPr>
-          <a:lstStyle/>
-          <a:p>
-            <a:pPr>
-              <a:defRPr sz="1200"/>
-            </a:pPr>
-            <a:r>
-              <a:t>Hugging Face</a:t>
-            </a:r>
-          </a:p>
-        </p:txBody>
-      </p:sp>
-      <p:sp>
-        <p:nvSpPr>
-          <p:cNvPr id="11" name="TextBox 10">
-            <a:hlinkClick r:id="rId8"/>
-          </p:cNvPr>
-          <p:cNvSpPr txBox="1"/>
-          <p:nvPr/>
-        </p:nvSpPr>
-        <p:spPr>
-          <a:xfrm>
-            <a:off x="13075920" y="6355080"/>
-            <a:ext cx="2011680" cy="320040"/>
-          </a:xfrm>
-          <a:prstGeom prst="rect">
-            <a:avLst/>
-          </a:prstGeom>
-          <a:noFill/>
-        </p:spPr>
-        <p:txBody>
-          <a:bodyPr wrap="none">
-            <a:spAutoFit/>
-          </a:bodyPr>
-          <a:lstStyle/>
-          <a:p>
-            <a:pPr>
-              <a:defRPr sz="1200"/>
-            </a:pPr>
-            <a:r>
-              <a:t>Contact</a:t>
-            </a:r>
-          </a:p>
-        </p:txBody>
-      </p:sp>
     </p:spTree>
   </p:cSld>
   <p:clrMapOvr>
@@ -5130,138 +4470,6 @@
           </a:p>
         </p:txBody>
       </p:sp>
-      <p:sp>
-        <p:nvSpPr>
-          <p:cNvPr id="8" name="TextBox 7">
-            <a:hlinkClick r:id="rId5"/>
-          </p:cNvPr>
-          <p:cNvSpPr txBox="1"/>
-          <p:nvPr/>
-        </p:nvSpPr>
-        <p:spPr>
-          <a:xfrm>
-            <a:off x="6766560" y="6355080"/>
-            <a:ext cx="2011680" cy="320040"/>
-          </a:xfrm>
-          <a:prstGeom prst="rect">
-            <a:avLst/>
-          </a:prstGeom>
-          <a:noFill/>
-        </p:spPr>
-        <p:txBody>
-          <a:bodyPr wrap="none">
-            <a:spAutoFit/>
-          </a:bodyPr>
-          <a:lstStyle/>
-          <a:p>
-            <a:pPr>
-              <a:defRPr sz="1200"/>
-            </a:pPr>
-            <a:r>
-              <a:t>X</a:t>
-            </a:r>
-          </a:p>
-        </p:txBody>
-      </p:sp>
-      <p:sp>
-        <p:nvSpPr>
-          <p:cNvPr id="9" name="TextBox 8">
-            <a:hlinkClick r:id="rId6"/>
-          </p:cNvPr>
-          <p:cNvSpPr txBox="1"/>
-          <p:nvPr/>
-        </p:nvSpPr>
-        <p:spPr>
-          <a:xfrm>
-            <a:off x="8869680" y="6355080"/>
-            <a:ext cx="2011680" cy="320040"/>
-          </a:xfrm>
-          <a:prstGeom prst="rect">
-            <a:avLst/>
-          </a:prstGeom>
-          <a:noFill/>
-        </p:spPr>
-        <p:txBody>
-          <a:bodyPr wrap="none">
-            <a:spAutoFit/>
-          </a:bodyPr>
-          <a:lstStyle/>
-          <a:p>
-            <a:pPr>
-              <a:defRPr sz="1200"/>
-            </a:pPr>
-            <a:r>
-              <a:t>LinkedIn</a:t>
-            </a:r>
-          </a:p>
-        </p:txBody>
-      </p:sp>
-      <p:sp>
-        <p:nvSpPr>
-          <p:cNvPr id="10" name="TextBox 9">
-            <a:hlinkClick r:id="rId7"/>
-          </p:cNvPr>
-          <p:cNvSpPr txBox="1"/>
-          <p:nvPr/>
-        </p:nvSpPr>
-        <p:spPr>
-          <a:xfrm>
-            <a:off x="10972800" y="6355080"/>
-            <a:ext cx="2011680" cy="320040"/>
-          </a:xfrm>
-          <a:prstGeom prst="rect">
-            <a:avLst/>
-          </a:prstGeom>
-          <a:noFill/>
-        </p:spPr>
-        <p:txBody>
-          <a:bodyPr wrap="none">
-            <a:spAutoFit/>
-          </a:bodyPr>
-          <a:lstStyle/>
-          <a:p>
-            <a:pPr>
-              <a:defRPr sz="1200"/>
-            </a:pPr>
-            <a:r>
-              <a:t>Hugging Face</a:t>
-            </a:r>
-          </a:p>
-        </p:txBody>
-      </p:sp>
-      <p:sp>
-        <p:nvSpPr>
-          <p:cNvPr id="11" name="TextBox 10">
-            <a:hlinkClick r:id="rId8"/>
-          </p:cNvPr>
-          <p:cNvSpPr txBox="1"/>
-          <p:nvPr/>
-        </p:nvSpPr>
-        <p:spPr>
-          <a:xfrm>
-            <a:off x="13075920" y="6355080"/>
-            <a:ext cx="2011680" cy="320040"/>
-          </a:xfrm>
-          <a:prstGeom prst="rect">
-            <a:avLst/>
-          </a:prstGeom>
-          <a:noFill/>
-        </p:spPr>
-        <p:txBody>
-          <a:bodyPr wrap="none">
-            <a:spAutoFit/>
-          </a:bodyPr>
-          <a:lstStyle/>
-          <a:p>
-            <a:pPr>
-              <a:defRPr sz="1200"/>
-            </a:pPr>
-            <a:r>
-              <a:t>Contact</a:t>
-            </a:r>
-          </a:p>
-        </p:txBody>
-      </p:sp>
     </p:spTree>
   </p:cSld>
   <p:clrMapOvr>
@@ -5489,138 +4697,6 @@
             </a:pPr>
             <a:r>
               <a:t>Profile</a:t>
-            </a:r>
-          </a:p>
-        </p:txBody>
-      </p:sp>
-      <p:sp>
-        <p:nvSpPr>
-          <p:cNvPr id="8" name="TextBox 7">
-            <a:hlinkClick r:id="rId5"/>
-          </p:cNvPr>
-          <p:cNvSpPr txBox="1"/>
-          <p:nvPr/>
-        </p:nvSpPr>
-        <p:spPr>
-          <a:xfrm>
-            <a:off x="6766560" y="6355080"/>
-            <a:ext cx="2011680" cy="320040"/>
-          </a:xfrm>
-          <a:prstGeom prst="rect">
-            <a:avLst/>
-          </a:prstGeom>
-          <a:noFill/>
-        </p:spPr>
-        <p:txBody>
-          <a:bodyPr wrap="none">
-            <a:spAutoFit/>
-          </a:bodyPr>
-          <a:lstStyle/>
-          <a:p>
-            <a:pPr>
-              <a:defRPr sz="1200"/>
-            </a:pPr>
-            <a:r>
-              <a:t>X</a:t>
-            </a:r>
-          </a:p>
-        </p:txBody>
-      </p:sp>
-      <p:sp>
-        <p:nvSpPr>
-          <p:cNvPr id="9" name="TextBox 8">
-            <a:hlinkClick r:id="rId6"/>
-          </p:cNvPr>
-          <p:cNvSpPr txBox="1"/>
-          <p:nvPr/>
-        </p:nvSpPr>
-        <p:spPr>
-          <a:xfrm>
-            <a:off x="8869680" y="6355080"/>
-            <a:ext cx="2011680" cy="320040"/>
-          </a:xfrm>
-          <a:prstGeom prst="rect">
-            <a:avLst/>
-          </a:prstGeom>
-          <a:noFill/>
-        </p:spPr>
-        <p:txBody>
-          <a:bodyPr wrap="none">
-            <a:spAutoFit/>
-          </a:bodyPr>
-          <a:lstStyle/>
-          <a:p>
-            <a:pPr>
-              <a:defRPr sz="1200"/>
-            </a:pPr>
-            <a:r>
-              <a:t>LinkedIn</a:t>
-            </a:r>
-          </a:p>
-        </p:txBody>
-      </p:sp>
-      <p:sp>
-        <p:nvSpPr>
-          <p:cNvPr id="10" name="TextBox 9">
-            <a:hlinkClick r:id="rId7"/>
-          </p:cNvPr>
-          <p:cNvSpPr txBox="1"/>
-          <p:nvPr/>
-        </p:nvSpPr>
-        <p:spPr>
-          <a:xfrm>
-            <a:off x="10972800" y="6355080"/>
-            <a:ext cx="2011680" cy="320040"/>
-          </a:xfrm>
-          <a:prstGeom prst="rect">
-            <a:avLst/>
-          </a:prstGeom>
-          <a:noFill/>
-        </p:spPr>
-        <p:txBody>
-          <a:bodyPr wrap="none">
-            <a:spAutoFit/>
-          </a:bodyPr>
-          <a:lstStyle/>
-          <a:p>
-            <a:pPr>
-              <a:defRPr sz="1200"/>
-            </a:pPr>
-            <a:r>
-              <a:t>Hugging Face</a:t>
-            </a:r>
-          </a:p>
-        </p:txBody>
-      </p:sp>
-      <p:sp>
-        <p:nvSpPr>
-          <p:cNvPr id="11" name="TextBox 10">
-            <a:hlinkClick r:id="rId8"/>
-          </p:cNvPr>
-          <p:cNvSpPr txBox="1"/>
-          <p:nvPr/>
-        </p:nvSpPr>
-        <p:spPr>
-          <a:xfrm>
-            <a:off x="13075920" y="6355080"/>
-            <a:ext cx="2011680" cy="320040"/>
-          </a:xfrm>
-          <a:prstGeom prst="rect">
-            <a:avLst/>
-          </a:prstGeom>
-          <a:noFill/>
-        </p:spPr>
-        <p:txBody>
-          <a:bodyPr wrap="none">
-            <a:spAutoFit/>
-          </a:bodyPr>
-          <a:lstStyle/>
-          <a:p>
-            <a:pPr>
-              <a:defRPr sz="1200"/>
-            </a:pPr>
-            <a:r>
-              <a:t>Contact</a:t>
             </a:r>
           </a:p>
         </p:txBody>

--- a/downloads/ba-study-deck.pptx
+++ b/downloads/ba-study-deck.pptx
@@ -12,6 +12,9 @@
     <p:sldId id="260" r:id="rId11"/>
     <p:sldId id="261" r:id="rId12"/>
     <p:sldId id="262" r:id="rId13"/>
+    <p:sldId id="263" r:id="rId14"/>
+    <p:sldId id="264" r:id="rId15"/>
+    <p:sldId id="265" r:id="rId16"/>
   </p:sldIdLst>
   <p:sldSz cx="12191695" cy="6858000" type="screen4x3"/>
   <p:notesSz cx="6858000" cy="9144000"/>
@@ -3103,7 +3106,7 @@
         <p:spPr>
           <a:xfrm>
             <a:off x="457200" y="274320"/>
-            <a:ext cx="11155680" cy="731520"/>
+            <a:ext cx="11155680" cy="640080"/>
           </a:xfrm>
           <a:prstGeom prst="rect">
             <a:avLst/>
@@ -3133,8 +3136,8 @@
         </p:nvSpPr>
         <p:spPr>
           <a:xfrm>
-            <a:off x="548640" y="1188720"/>
-            <a:ext cx="10972800" cy="4206240"/>
+            <a:off x="548640" y="1051560"/>
+            <a:ext cx="10972800" cy="4297680"/>
           </a:xfrm>
           <a:prstGeom prst="rect">
             <a:avLst/>
@@ -3168,6 +3171,221 @@
             </a:pPr>
             <a:r>
               <a:t>Fees are cited. Unknowns stay unknown.</a:t>
+            </a:r>
+          </a:p>
+        </p:txBody>
+      </p:sp>
+      <p:sp>
+        <p:nvSpPr>
+          <p:cNvPr id="4" name="TextBox 3"/>
+          <p:cNvSpPr txBox="1"/>
+          <p:nvPr/>
+        </p:nvSpPr>
+        <p:spPr>
+          <a:xfrm>
+            <a:off x="457200" y="5623560"/>
+            <a:ext cx="11155680" cy="1005840"/>
+          </a:xfrm>
+          <a:prstGeom prst="rect">
+            <a:avLst/>
+          </a:prstGeom>
+          <a:noFill/>
+        </p:spPr>
+        <p:txBody>
+          <a:bodyPr wrap="square">
+            <a:spAutoFit/>
+          </a:bodyPr>
+          <a:lstStyle/>
+          <a:p>
+            <a:pPr>
+              <a:defRPr sz="1000"/>
+            </a:pPr>
+            <a:r>
+              <a:t>CypherMonkey Labs · © 2026 CypherMonkeyLabs</a:t>
+            </a:r>
+          </a:p>
+          <a:p>
+            <a:r>
+              <a:t>Independent, free, learning-only student project. Respects every company and vendor. Trademarks belong to their owners. Not affiliated or endorsed. Concerns are removed or corrected promptly via the contact form at https</a:t>
+            </a:r>
+          </a:p>
+        </p:txBody>
+      </p:sp>
+      <p:sp>
+        <p:nvSpPr>
+          <p:cNvPr id="5" name="TextBox 4">
+            <a:hlinkClick r:id="rId2"/>
+          </p:cNvPr>
+          <p:cNvSpPr txBox="1"/>
+          <p:nvPr/>
+        </p:nvSpPr>
+        <p:spPr>
+          <a:xfrm>
+            <a:off x="457200" y="6355080"/>
+            <a:ext cx="2011680" cy="320040"/>
+          </a:xfrm>
+          <a:prstGeom prst="rect">
+            <a:avLst/>
+          </a:prstGeom>
+          <a:noFill/>
+        </p:spPr>
+        <p:txBody>
+          <a:bodyPr wrap="none">
+            <a:spAutoFit/>
+          </a:bodyPr>
+          <a:lstStyle/>
+          <a:p>
+            <a:pPr>
+              <a:defRPr sz="1200"/>
+            </a:pPr>
+            <a:r>
+              <a:t>Website</a:t>
+            </a:r>
+          </a:p>
+        </p:txBody>
+      </p:sp>
+      <p:sp>
+        <p:nvSpPr>
+          <p:cNvPr id="6" name="TextBox 5">
+            <a:hlinkClick r:id="rId3"/>
+          </p:cNvPr>
+          <p:cNvSpPr txBox="1"/>
+          <p:nvPr/>
+        </p:nvSpPr>
+        <p:spPr>
+          <a:xfrm>
+            <a:off x="2560320" y="6355080"/>
+            <a:ext cx="2011680" cy="320040"/>
+          </a:xfrm>
+          <a:prstGeom prst="rect">
+            <a:avLst/>
+          </a:prstGeom>
+          <a:noFill/>
+        </p:spPr>
+        <p:txBody>
+          <a:bodyPr wrap="none">
+            <a:spAutoFit/>
+          </a:bodyPr>
+          <a:lstStyle/>
+          <a:p>
+            <a:pPr>
+              <a:defRPr sz="1200"/>
+            </a:pPr>
+            <a:r>
+              <a:t>GitHub</a:t>
+            </a:r>
+          </a:p>
+        </p:txBody>
+      </p:sp>
+      <p:sp>
+        <p:nvSpPr>
+          <p:cNvPr id="7" name="TextBox 6">
+            <a:hlinkClick r:id="rId4"/>
+          </p:cNvPr>
+          <p:cNvSpPr txBox="1"/>
+          <p:nvPr/>
+        </p:nvSpPr>
+        <p:spPr>
+          <a:xfrm>
+            <a:off x="4663440" y="6355080"/>
+            <a:ext cx="2011680" cy="320040"/>
+          </a:xfrm>
+          <a:prstGeom prst="rect">
+            <a:avLst/>
+          </a:prstGeom>
+          <a:noFill/>
+        </p:spPr>
+        <p:txBody>
+          <a:bodyPr wrap="none">
+            <a:spAutoFit/>
+          </a:bodyPr>
+          <a:lstStyle/>
+          <a:p>
+            <a:pPr>
+              <a:defRPr sz="1200"/>
+            </a:pPr>
+            <a:r>
+              <a:t>Profile</a:t>
+            </a:r>
+          </a:p>
+        </p:txBody>
+      </p:sp>
+    </p:spTree>
+  </p:cSld>
+  <p:clrMapOvr>
+    <a:masterClrMapping/>
+  </p:clrMapOvr>
+</p:sld>
+</file>
+
+<file path=ppt/slides/slide10.xml><?xml version="1.0" encoding="utf-8"?>
+<p:sld xmlns:a="http://schemas.openxmlformats.org/drawingml/2006/main" xmlns:p="http://schemas.openxmlformats.org/presentationml/2006/main" xmlns:r="http://schemas.openxmlformats.org/officeDocument/2006/relationships">
+  <p:cSld>
+    <p:spTree>
+      <p:nvGrpSpPr>
+        <p:cNvPr id="1" name=""/>
+        <p:cNvGrpSpPr/>
+        <p:nvPr/>
+      </p:nvGrpSpPr>
+      <p:grpSpPr/>
+      <p:sp>
+        <p:nvSpPr>
+          <p:cNvPr id="2" name="TextBox 1"/>
+          <p:cNvSpPr txBox="1"/>
+          <p:nvPr/>
+        </p:nvSpPr>
+        <p:spPr>
+          <a:xfrm>
+            <a:off x="457200" y="274320"/>
+            <a:ext cx="11155680" cy="640080"/>
+          </a:xfrm>
+          <a:prstGeom prst="rect">
+            <a:avLst/>
+          </a:prstGeom>
+          <a:noFill/>
+        </p:spPr>
+        <p:txBody>
+          <a:bodyPr wrap="none">
+            <a:spAutoFit/>
+          </a:bodyPr>
+          <a:lstStyle/>
+          <a:p>
+            <a:pPr>
+              <a:defRPr sz="2800" b="1"/>
+            </a:pPr>
+            <a:r>
+              <a:t>Sources and go deeper, continued</a:t>
+            </a:r>
+          </a:p>
+        </p:txBody>
+      </p:sp>
+      <p:sp>
+        <p:nvSpPr>
+          <p:cNvPr id="3" name="TextBox 2"/>
+          <p:cNvSpPr txBox="1"/>
+          <p:nvPr/>
+        </p:nvSpPr>
+        <p:spPr>
+          <a:xfrm>
+            <a:off x="548640" y="1051560"/>
+            <a:ext cx="10972800" cy="4297680"/>
+          </a:xfrm>
+          <a:prstGeom prst="rect">
+            <a:avLst/>
+          </a:prstGeom>
+          <a:noFill/>
+        </p:spPr>
+        <p:txBody>
+          <a:bodyPr wrap="square">
+            <a:spAutoFit/>
+          </a:bodyPr>
+          <a:lstStyle/>
+          <a:p>
+            <a:pPr>
+              <a:defRPr sz="1400"/>
+            </a:pPr>
+            <a:r>
+              <a:t>How to Meet WCAG, quick reference (official). https://www.w3.org/WAI/WCAG22/quickref/ last checked 2026-10.</a:t>
             </a:r>
           </a:p>
         </p:txBody>
@@ -3334,7 +3552,7 @@
         <p:spPr>
           <a:xfrm>
             <a:off x="457200" y="274320"/>
-            <a:ext cx="11155680" cy="731520"/>
+            <a:ext cx="11155680" cy="640080"/>
           </a:xfrm>
           <a:prstGeom prst="rect">
             <a:avLst/>
@@ -3364,8 +3582,8 @@
         </p:nvSpPr>
         <p:spPr>
           <a:xfrm>
-            <a:off x="548640" y="1188720"/>
-            <a:ext cx="10972800" cy="4206240"/>
+            <a:off x="548640" y="1051560"/>
+            <a:ext cx="10972800" cy="4297680"/>
           </a:xfrm>
           <a:prstGeom prst="rect">
             <a:avLst/>
@@ -3565,7 +3783,7 @@
         <p:spPr>
           <a:xfrm>
             <a:off x="457200" y="274320"/>
-            <a:ext cx="11155680" cy="731520"/>
+            <a:ext cx="11155680" cy="640080"/>
           </a:xfrm>
           <a:prstGeom prst="rect">
             <a:avLst/>
@@ -3595,8 +3813,8 @@
         </p:nvSpPr>
         <p:spPr>
           <a:xfrm>
-            <a:off x="548640" y="1188720"/>
-            <a:ext cx="10972800" cy="4206240"/>
+            <a:off x="548640" y="1051560"/>
+            <a:ext cx="10972800" cy="4297680"/>
           </a:xfrm>
           <a:prstGeom prst="rect">
             <a:avLst/>
@@ -3804,7 +4022,7 @@
         <p:spPr>
           <a:xfrm>
             <a:off x="457200" y="274320"/>
-            <a:ext cx="11155680" cy="731520"/>
+            <a:ext cx="11155680" cy="640080"/>
           </a:xfrm>
           <a:prstGeom prst="rect">
             <a:avLst/>
@@ -3834,8 +4052,8 @@
         </p:nvSpPr>
         <p:spPr>
           <a:xfrm>
-            <a:off x="548640" y="1188720"/>
-            <a:ext cx="10972800" cy="4206240"/>
+            <a:off x="548640" y="1051560"/>
+            <a:ext cx="10972800" cy="4297680"/>
           </a:xfrm>
           <a:prstGeom prst="rect">
             <a:avLst/>
@@ -4035,7 +4253,7 @@
         <p:spPr>
           <a:xfrm>
             <a:off x="457200" y="274320"/>
-            <a:ext cx="11155680" cy="731520"/>
+            <a:ext cx="11155680" cy="640080"/>
           </a:xfrm>
           <a:prstGeom prst="rect">
             <a:avLst/>
@@ -4065,8 +4283,8 @@
         </p:nvSpPr>
         <p:spPr>
           <a:xfrm>
-            <a:off x="548640" y="1188720"/>
-            <a:ext cx="10972800" cy="4206240"/>
+            <a:off x="548640" y="1051560"/>
+            <a:ext cx="10972800" cy="4297680"/>
           </a:xfrm>
           <a:prstGeom prst="rect">
             <a:avLst/>
@@ -4266,7 +4484,7 @@
         <p:spPr>
           <a:xfrm>
             <a:off x="457200" y="274320"/>
-            <a:ext cx="11155680" cy="731520"/>
+            <a:ext cx="11155680" cy="640080"/>
           </a:xfrm>
           <a:prstGeom prst="rect">
             <a:avLst/>
@@ -4296,8 +4514,8 @@
         </p:nvSpPr>
         <p:spPr>
           <a:xfrm>
-            <a:off x="548640" y="1188720"/>
-            <a:ext cx="10972800" cy="4206240"/>
+            <a:off x="548640" y="1051560"/>
+            <a:ext cx="10972800" cy="4297680"/>
           </a:xfrm>
           <a:prstGeom prst="rect">
             <a:avLst/>
@@ -4497,7 +4715,7 @@
         <p:spPr>
           <a:xfrm>
             <a:off x="457200" y="274320"/>
-            <a:ext cx="11155680" cy="731520"/>
+            <a:ext cx="11155680" cy="640080"/>
           </a:xfrm>
           <a:prstGeom prst="rect">
             <a:avLst/>
@@ -4527,8 +4745,8 @@
         </p:nvSpPr>
         <p:spPr>
           <a:xfrm>
-            <a:off x="548640" y="1188720"/>
-            <a:ext cx="10972800" cy="4206240"/>
+            <a:off x="548640" y="1051560"/>
+            <a:ext cx="10972800" cy="4297680"/>
           </a:xfrm>
           <a:prstGeom prst="rect">
             <a:avLst/>
@@ -4562,6 +4780,532 @@
             </a:pPr>
             <a:r>
               <a:t>Correct us via the contact form.</a:t>
+            </a:r>
+          </a:p>
+        </p:txBody>
+      </p:sp>
+      <p:sp>
+        <p:nvSpPr>
+          <p:cNvPr id="4" name="TextBox 3"/>
+          <p:cNvSpPr txBox="1"/>
+          <p:nvPr/>
+        </p:nvSpPr>
+        <p:spPr>
+          <a:xfrm>
+            <a:off x="457200" y="5623560"/>
+            <a:ext cx="11155680" cy="1005840"/>
+          </a:xfrm>
+          <a:prstGeom prst="rect">
+            <a:avLst/>
+          </a:prstGeom>
+          <a:noFill/>
+        </p:spPr>
+        <p:txBody>
+          <a:bodyPr wrap="square">
+            <a:spAutoFit/>
+          </a:bodyPr>
+          <a:lstStyle/>
+          <a:p>
+            <a:pPr>
+              <a:defRPr sz="1000"/>
+            </a:pPr>
+            <a:r>
+              <a:t>CypherMonkey Labs · © 2026 CypherMonkeyLabs</a:t>
+            </a:r>
+          </a:p>
+          <a:p>
+            <a:r>
+              <a:t>Independent, free, learning-only student project. Respects every company and vendor. Trademarks belong to their owners. Not affiliated or endorsed. Concerns are removed or corrected promptly via the contact form at https</a:t>
+            </a:r>
+          </a:p>
+        </p:txBody>
+      </p:sp>
+      <p:sp>
+        <p:nvSpPr>
+          <p:cNvPr id="5" name="TextBox 4">
+            <a:hlinkClick r:id="rId2"/>
+          </p:cNvPr>
+          <p:cNvSpPr txBox="1"/>
+          <p:nvPr/>
+        </p:nvSpPr>
+        <p:spPr>
+          <a:xfrm>
+            <a:off x="457200" y="6355080"/>
+            <a:ext cx="2011680" cy="320040"/>
+          </a:xfrm>
+          <a:prstGeom prst="rect">
+            <a:avLst/>
+          </a:prstGeom>
+          <a:noFill/>
+        </p:spPr>
+        <p:txBody>
+          <a:bodyPr wrap="none">
+            <a:spAutoFit/>
+          </a:bodyPr>
+          <a:lstStyle/>
+          <a:p>
+            <a:pPr>
+              <a:defRPr sz="1200"/>
+            </a:pPr>
+            <a:r>
+              <a:t>Website</a:t>
+            </a:r>
+          </a:p>
+        </p:txBody>
+      </p:sp>
+      <p:sp>
+        <p:nvSpPr>
+          <p:cNvPr id="6" name="TextBox 5">
+            <a:hlinkClick r:id="rId3"/>
+          </p:cNvPr>
+          <p:cNvSpPr txBox="1"/>
+          <p:nvPr/>
+        </p:nvSpPr>
+        <p:spPr>
+          <a:xfrm>
+            <a:off x="2560320" y="6355080"/>
+            <a:ext cx="2011680" cy="320040"/>
+          </a:xfrm>
+          <a:prstGeom prst="rect">
+            <a:avLst/>
+          </a:prstGeom>
+          <a:noFill/>
+        </p:spPr>
+        <p:txBody>
+          <a:bodyPr wrap="none">
+            <a:spAutoFit/>
+          </a:bodyPr>
+          <a:lstStyle/>
+          <a:p>
+            <a:pPr>
+              <a:defRPr sz="1200"/>
+            </a:pPr>
+            <a:r>
+              <a:t>GitHub</a:t>
+            </a:r>
+          </a:p>
+        </p:txBody>
+      </p:sp>
+      <p:sp>
+        <p:nvSpPr>
+          <p:cNvPr id="7" name="TextBox 6">
+            <a:hlinkClick r:id="rId4"/>
+          </p:cNvPr>
+          <p:cNvSpPr txBox="1"/>
+          <p:nvPr/>
+        </p:nvSpPr>
+        <p:spPr>
+          <a:xfrm>
+            <a:off x="4663440" y="6355080"/>
+            <a:ext cx="2011680" cy="320040"/>
+          </a:xfrm>
+          <a:prstGeom prst="rect">
+            <a:avLst/>
+          </a:prstGeom>
+          <a:noFill/>
+        </p:spPr>
+        <p:txBody>
+          <a:bodyPr wrap="none">
+            <a:spAutoFit/>
+          </a:bodyPr>
+          <a:lstStyle/>
+          <a:p>
+            <a:pPr>
+              <a:defRPr sz="1200"/>
+            </a:pPr>
+            <a:r>
+              <a:t>Profile</a:t>
+            </a:r>
+          </a:p>
+        </p:txBody>
+      </p:sp>
+    </p:spTree>
+  </p:cSld>
+  <p:clrMapOvr>
+    <a:masterClrMapping/>
+  </p:clrMapOvr>
+</p:sld>
+</file>
+
+<file path=ppt/slides/slide8.xml><?xml version="1.0" encoding="utf-8"?>
+<p:sld xmlns:a="http://schemas.openxmlformats.org/drawingml/2006/main" xmlns:p="http://schemas.openxmlformats.org/presentationml/2006/main" xmlns:r="http://schemas.openxmlformats.org/officeDocument/2006/relationships">
+  <p:cSld>
+    <p:spTree>
+      <p:nvGrpSpPr>
+        <p:cNvPr id="1" name=""/>
+        <p:cNvGrpSpPr/>
+        <p:nvPr/>
+      </p:nvGrpSpPr>
+      <p:grpSpPr/>
+      <p:sp>
+        <p:nvSpPr>
+          <p:cNvPr id="2" name="TextBox 1"/>
+          <p:cNvSpPr txBox="1"/>
+          <p:nvPr/>
+        </p:nvSpPr>
+        <p:spPr>
+          <a:xfrm>
+            <a:off x="457200" y="274320"/>
+            <a:ext cx="11155680" cy="640080"/>
+          </a:xfrm>
+          <a:prstGeom prst="rect">
+            <a:avLst/>
+          </a:prstGeom>
+          <a:noFill/>
+        </p:spPr>
+        <p:txBody>
+          <a:bodyPr wrap="none">
+            <a:spAutoFit/>
+          </a:bodyPr>
+          <a:lstStyle/>
+          <a:p>
+            <a:pPr>
+              <a:defRPr sz="2800" b="1"/>
+            </a:pPr>
+            <a:r>
+              <a:t>Sources and go deeper</a:t>
+            </a:r>
+          </a:p>
+        </p:txBody>
+      </p:sp>
+      <p:sp>
+        <p:nvSpPr>
+          <p:cNvPr id="3" name="TextBox 2"/>
+          <p:cNvSpPr txBox="1"/>
+          <p:nvPr/>
+        </p:nvSpPr>
+        <p:spPr>
+          <a:xfrm>
+            <a:off x="548640" y="1051560"/>
+            <a:ext cx="10972800" cy="4297680"/>
+          </a:xfrm>
+          <a:prstGeom prst="rect">
+            <a:avLst/>
+          </a:prstGeom>
+          <a:noFill/>
+        </p:spPr>
+        <p:txBody>
+          <a:bodyPr wrap="square">
+            <a:spAutoFit/>
+          </a:bodyPr>
+          <a:lstStyle/>
+          <a:p>
+            <a:pPr>
+              <a:defRPr sz="1400"/>
+            </a:pPr>
+            <a:r>
+              <a:t>IIBA KnowledgeHub, including the BABOK Guide contents (standard). https://www.iiba.org/knowledgehub/ last checked 2026-10.</a:t>
+            </a:r>
+          </a:p>
+          <a:p>
+            <a:pPr>
+              <a:defRPr sz="1400"/>
+            </a:pPr>
+            <a:r>
+              <a:t>BABOK Guide article on the IIBA knowledge hub (standard). confirm. last checked 2026-10.</a:t>
+            </a:r>
+          </a:p>
+          <a:p>
+            <a:pPr>
+              <a:defRPr sz="1400"/>
+            </a:pPr>
+            <a:r>
+              <a:t>IIBA home (official). https://www.iiba.org/ last checked 2026-10.</a:t>
+            </a:r>
+          </a:p>
+          <a:p>
+            <a:pPr>
+              <a:defRPr sz="1400"/>
+            </a:pPr>
+            <a:r>
+              <a:t>Manifesto for Agile Software Development (standard). https://agilemanifesto.org/ last checked 2026-10.</a:t>
+            </a:r>
+          </a:p>
+          <a:p>
+            <a:pPr>
+              <a:defRPr sz="1400"/>
+            </a:pPr>
+            <a:r>
+              <a:t>Principles behind the Agile Manifesto (standard). https://agilemanifesto.org/principles.html last checked 2026-10.</a:t>
+            </a:r>
+          </a:p>
+          <a:p>
+            <a:pPr>
+              <a:defRPr sz="1400"/>
+            </a:pPr>
+            <a:r>
+              <a:t>OMG, about BPMN 2.0 (standard). https://www.omg.org/spec/BPMN/2.0/About-BPMN last checked 2026-10.</a:t>
+            </a:r>
+          </a:p>
+          <a:p>
+            <a:pPr>
+              <a:defRPr sz="1400"/>
+            </a:pPr>
+            <a:r>
+              <a:t>BPMN 2.0 specification PDF (standard). https://www.omg.org/spec/BPMN/2.0/PDF last checked 2026-10.</a:t>
+            </a:r>
+          </a:p>
+        </p:txBody>
+      </p:sp>
+      <p:sp>
+        <p:nvSpPr>
+          <p:cNvPr id="4" name="TextBox 3"/>
+          <p:cNvSpPr txBox="1"/>
+          <p:nvPr/>
+        </p:nvSpPr>
+        <p:spPr>
+          <a:xfrm>
+            <a:off x="457200" y="5623560"/>
+            <a:ext cx="11155680" cy="1005840"/>
+          </a:xfrm>
+          <a:prstGeom prst="rect">
+            <a:avLst/>
+          </a:prstGeom>
+          <a:noFill/>
+        </p:spPr>
+        <p:txBody>
+          <a:bodyPr wrap="square">
+            <a:spAutoFit/>
+          </a:bodyPr>
+          <a:lstStyle/>
+          <a:p>
+            <a:pPr>
+              <a:defRPr sz="1000"/>
+            </a:pPr>
+            <a:r>
+              <a:t>CypherMonkey Labs · © 2026 CypherMonkeyLabs</a:t>
+            </a:r>
+          </a:p>
+          <a:p>
+            <a:r>
+              <a:t>Independent, free, learning-only student project. Respects every company and vendor. Trademarks belong to their owners. Not affiliated or endorsed. Concerns are removed or corrected promptly via the contact form at https</a:t>
+            </a:r>
+          </a:p>
+        </p:txBody>
+      </p:sp>
+      <p:sp>
+        <p:nvSpPr>
+          <p:cNvPr id="5" name="TextBox 4">
+            <a:hlinkClick r:id="rId2"/>
+          </p:cNvPr>
+          <p:cNvSpPr txBox="1"/>
+          <p:nvPr/>
+        </p:nvSpPr>
+        <p:spPr>
+          <a:xfrm>
+            <a:off x="457200" y="6355080"/>
+            <a:ext cx="2011680" cy="320040"/>
+          </a:xfrm>
+          <a:prstGeom prst="rect">
+            <a:avLst/>
+          </a:prstGeom>
+          <a:noFill/>
+        </p:spPr>
+        <p:txBody>
+          <a:bodyPr wrap="none">
+            <a:spAutoFit/>
+          </a:bodyPr>
+          <a:lstStyle/>
+          <a:p>
+            <a:pPr>
+              <a:defRPr sz="1200"/>
+            </a:pPr>
+            <a:r>
+              <a:t>Website</a:t>
+            </a:r>
+          </a:p>
+        </p:txBody>
+      </p:sp>
+      <p:sp>
+        <p:nvSpPr>
+          <p:cNvPr id="6" name="TextBox 5">
+            <a:hlinkClick r:id="rId3"/>
+          </p:cNvPr>
+          <p:cNvSpPr txBox="1"/>
+          <p:nvPr/>
+        </p:nvSpPr>
+        <p:spPr>
+          <a:xfrm>
+            <a:off x="2560320" y="6355080"/>
+            <a:ext cx="2011680" cy="320040"/>
+          </a:xfrm>
+          <a:prstGeom prst="rect">
+            <a:avLst/>
+          </a:prstGeom>
+          <a:noFill/>
+        </p:spPr>
+        <p:txBody>
+          <a:bodyPr wrap="none">
+            <a:spAutoFit/>
+          </a:bodyPr>
+          <a:lstStyle/>
+          <a:p>
+            <a:pPr>
+              <a:defRPr sz="1200"/>
+            </a:pPr>
+            <a:r>
+              <a:t>GitHub</a:t>
+            </a:r>
+          </a:p>
+        </p:txBody>
+      </p:sp>
+      <p:sp>
+        <p:nvSpPr>
+          <p:cNvPr id="7" name="TextBox 6">
+            <a:hlinkClick r:id="rId4"/>
+          </p:cNvPr>
+          <p:cNvSpPr txBox="1"/>
+          <p:nvPr/>
+        </p:nvSpPr>
+        <p:spPr>
+          <a:xfrm>
+            <a:off x="4663440" y="6355080"/>
+            <a:ext cx="2011680" cy="320040"/>
+          </a:xfrm>
+          <a:prstGeom prst="rect">
+            <a:avLst/>
+          </a:prstGeom>
+          <a:noFill/>
+        </p:spPr>
+        <p:txBody>
+          <a:bodyPr wrap="none">
+            <a:spAutoFit/>
+          </a:bodyPr>
+          <a:lstStyle/>
+          <a:p>
+            <a:pPr>
+              <a:defRPr sz="1200"/>
+            </a:pPr>
+            <a:r>
+              <a:t>Profile</a:t>
+            </a:r>
+          </a:p>
+        </p:txBody>
+      </p:sp>
+    </p:spTree>
+  </p:cSld>
+  <p:clrMapOvr>
+    <a:masterClrMapping/>
+  </p:clrMapOvr>
+</p:sld>
+</file>
+
+<file path=ppt/slides/slide9.xml><?xml version="1.0" encoding="utf-8"?>
+<p:sld xmlns:a="http://schemas.openxmlformats.org/drawingml/2006/main" xmlns:p="http://schemas.openxmlformats.org/presentationml/2006/main" xmlns:r="http://schemas.openxmlformats.org/officeDocument/2006/relationships">
+  <p:cSld>
+    <p:spTree>
+      <p:nvGrpSpPr>
+        <p:cNvPr id="1" name=""/>
+        <p:cNvGrpSpPr/>
+        <p:nvPr/>
+      </p:nvGrpSpPr>
+      <p:grpSpPr/>
+      <p:sp>
+        <p:nvSpPr>
+          <p:cNvPr id="2" name="TextBox 1"/>
+          <p:cNvSpPr txBox="1"/>
+          <p:nvPr/>
+        </p:nvSpPr>
+        <p:spPr>
+          <a:xfrm>
+            <a:off x="457200" y="274320"/>
+            <a:ext cx="11155680" cy="640080"/>
+          </a:xfrm>
+          <a:prstGeom prst="rect">
+            <a:avLst/>
+          </a:prstGeom>
+          <a:noFill/>
+        </p:spPr>
+        <p:txBody>
+          <a:bodyPr wrap="none">
+            <a:spAutoFit/>
+          </a:bodyPr>
+          <a:lstStyle/>
+          <a:p>
+            <a:pPr>
+              <a:defRPr sz="2800" b="1"/>
+            </a:pPr>
+            <a:r>
+              <a:t>Sources and go deeper, continued</a:t>
+            </a:r>
+          </a:p>
+        </p:txBody>
+      </p:sp>
+      <p:sp>
+        <p:nvSpPr>
+          <p:cNvPr id="3" name="TextBox 2"/>
+          <p:cNvSpPr txBox="1"/>
+          <p:nvPr/>
+        </p:nvSpPr>
+        <p:spPr>
+          <a:xfrm>
+            <a:off x="548640" y="1051560"/>
+            <a:ext cx="10972800" cy="4297680"/>
+          </a:xfrm>
+          <a:prstGeom prst="rect">
+            <a:avLst/>
+          </a:prstGeom>
+          <a:noFill/>
+        </p:spPr>
+        <p:txBody>
+          <a:bodyPr wrap="square">
+            <a:spAutoFit/>
+          </a:bodyPr>
+          <a:lstStyle/>
+          <a:p>
+            <a:pPr>
+              <a:defRPr sz="1400"/>
+            </a:pPr>
+            <a:r>
+              <a:t>OMG, about BPMN 2.0.2 (standard). https://www.omg.org/spec/BPMN/2.0.2/About-BPMN last checked 2026-10.</a:t>
+            </a:r>
+          </a:p>
+          <a:p>
+            <a:pPr>
+              <a:defRPr sz="1400"/>
+            </a:pPr>
+            <a:r>
+              <a:t>OMG, about UML 2.5.1 (standard). https://www.omg.org/spec/UML/2.5.1/About-UML last checked 2026-10.</a:t>
+            </a:r>
+          </a:p>
+          <a:p>
+            <a:pPr>
+              <a:defRPr sz="1400"/>
+            </a:pPr>
+            <a:r>
+              <a:t>UML 2.5.1 specification PDF (standard). https://www.omg.org/spec/UML/2.5.1/PDF last checked 2026-10.</a:t>
+            </a:r>
+          </a:p>
+          <a:p>
+            <a:pPr>
+              <a:defRPr sz="1400"/>
+            </a:pPr>
+            <a:r>
+              <a:t>IIBA membership (community). https://www.iiba.org/membership/ last checked 2026-10.</a:t>
+            </a:r>
+          </a:p>
+          <a:p>
+            <a:pPr>
+              <a:defRPr sz="1400"/>
+            </a:pPr>
+            <a:r>
+              <a:t>OMG managed communities (community). https://www.omg.org/communities/ last checked 2026-10.</a:t>
+            </a:r>
+          </a:p>
+          <a:p>
+            <a:pPr>
+              <a:defRPr sz="1400"/>
+            </a:pPr>
+            <a:r>
+              <a:t>About IIBA (official). https://www.iiba.org/about-iiba/ last checked 2026-10.</a:t>
+            </a:r>
+          </a:p>
+          <a:p>
+            <a:pPr>
+              <a:defRPr sz="1400"/>
+            </a:pPr>
+            <a:r>
+              <a:t>WCAG 2.2 recommendation (standard). https://www.w3.org/TR/WCAG22/ last checked 2026-10.</a:t>
             </a:r>
           </a:p>
         </p:txBody>

--- a/downloads/ba-study-deck.pptx
+++ b/downloads/ba-study-deck.pptx
@@ -12,6 +12,9 @@
     <p:sldId id="260" r:id="rId11"/>
     <p:sldId id="261" r:id="rId12"/>
     <p:sldId id="262" r:id="rId13"/>
+    <p:sldId id="263" r:id="rId14"/>
+    <p:sldId id="264" r:id="rId15"/>
+    <p:sldId id="265" r:id="rId16"/>
   </p:sldIdLst>
   <p:sldSz cx="12191695" cy="6858000" type="screen4x3"/>
   <p:notesSz cx="6858000" cy="9144000"/>
@@ -3103,7 +3106,7 @@
         <p:spPr>
           <a:xfrm>
             <a:off x="457200" y="274320"/>
-            <a:ext cx="11155680" cy="731520"/>
+            <a:ext cx="11155680" cy="640080"/>
           </a:xfrm>
           <a:prstGeom prst="rect">
             <a:avLst/>
@@ -3133,8 +3136,8 @@
         </p:nvSpPr>
         <p:spPr>
           <a:xfrm>
-            <a:off x="548640" y="1188720"/>
-            <a:ext cx="10972800" cy="4206240"/>
+            <a:off x="548640" y="1051560"/>
+            <a:ext cx="10972800" cy="4297680"/>
           </a:xfrm>
           <a:prstGeom prst="rect">
             <a:avLst/>
@@ -3203,7 +3206,7 @@
           </a:p>
           <a:p>
             <a:r>
-              <a:t>Independent, free, learning-only student project. Respects every company, tradition, and vendor. Trademarks and sources belong to their owners. Not sold. Concerns are handled by correcting or removing content promptly vi</a:t>
+              <a:t>Independent, free, learning-only student project. Respects every company and vendor. Trademarks belong to their owners. Not affiliated or endorsed. Concerns are removed or corrected promptly via the contact form at https</a:t>
             </a:r>
           </a:p>
         </p:txBody>
@@ -3236,7 +3239,7 @@
               <a:defRPr sz="1200"/>
             </a:pPr>
             <a:r>
-              <a:t>GitHub</a:t>
+              <a:t>Website</a:t>
             </a:r>
           </a:p>
         </p:txBody>
@@ -3269,7 +3272,7 @@
               <a:defRPr sz="1200"/>
             </a:pPr>
             <a:r>
-              <a:t>Website</a:t>
+              <a:t>GitHub</a:t>
             </a:r>
           </a:p>
         </p:txBody>
@@ -3302,22 +3305,138 @@
               <a:defRPr sz="1200"/>
             </a:pPr>
             <a:r>
-              <a:t>X</a:t>
-            </a:r>
-          </a:p>
-        </p:txBody>
-      </p:sp>
-      <p:sp>
-        <p:nvSpPr>
-          <p:cNvPr id="8" name="TextBox 7">
-            <a:hlinkClick r:id="rId5"/>
+              <a:t>Profile</a:t>
+            </a:r>
+          </a:p>
+        </p:txBody>
+      </p:sp>
+    </p:spTree>
+  </p:cSld>
+  <p:clrMapOvr>
+    <a:masterClrMapping/>
+  </p:clrMapOvr>
+</p:sld>
+</file>
+
+<file path=ppt/slides/slide10.xml><?xml version="1.0" encoding="utf-8"?>
+<p:sld xmlns:a="http://schemas.openxmlformats.org/drawingml/2006/main" xmlns:p="http://schemas.openxmlformats.org/presentationml/2006/main" xmlns:r="http://schemas.openxmlformats.org/officeDocument/2006/relationships">
+  <p:cSld>
+    <p:spTree>
+      <p:nvGrpSpPr>
+        <p:cNvPr id="1" name=""/>
+        <p:cNvGrpSpPr/>
+        <p:nvPr/>
+      </p:nvGrpSpPr>
+      <p:grpSpPr/>
+      <p:sp>
+        <p:nvSpPr>
+          <p:cNvPr id="2" name="TextBox 1"/>
+          <p:cNvSpPr txBox="1"/>
+          <p:nvPr/>
+        </p:nvSpPr>
+        <p:spPr>
+          <a:xfrm>
+            <a:off x="457200" y="274320"/>
+            <a:ext cx="11155680" cy="640080"/>
+          </a:xfrm>
+          <a:prstGeom prst="rect">
+            <a:avLst/>
+          </a:prstGeom>
+          <a:noFill/>
+        </p:spPr>
+        <p:txBody>
+          <a:bodyPr wrap="none">
+            <a:spAutoFit/>
+          </a:bodyPr>
+          <a:lstStyle/>
+          <a:p>
+            <a:pPr>
+              <a:defRPr sz="2800" b="1"/>
+            </a:pPr>
+            <a:r>
+              <a:t>Sources and go deeper, continued</a:t>
+            </a:r>
+          </a:p>
+        </p:txBody>
+      </p:sp>
+      <p:sp>
+        <p:nvSpPr>
+          <p:cNvPr id="3" name="TextBox 2"/>
+          <p:cNvSpPr txBox="1"/>
+          <p:nvPr/>
+        </p:nvSpPr>
+        <p:spPr>
+          <a:xfrm>
+            <a:off x="548640" y="1051560"/>
+            <a:ext cx="10972800" cy="4297680"/>
+          </a:xfrm>
+          <a:prstGeom prst="rect">
+            <a:avLst/>
+          </a:prstGeom>
+          <a:noFill/>
+        </p:spPr>
+        <p:txBody>
+          <a:bodyPr wrap="square">
+            <a:spAutoFit/>
+          </a:bodyPr>
+          <a:lstStyle/>
+          <a:p>
+            <a:pPr>
+              <a:defRPr sz="1400"/>
+            </a:pPr>
+            <a:r>
+              <a:t>How to Meet WCAG, quick reference (official). https://www.w3.org/WAI/WCAG22/quickref/ last checked 2026-10.</a:t>
+            </a:r>
+          </a:p>
+        </p:txBody>
+      </p:sp>
+      <p:sp>
+        <p:nvSpPr>
+          <p:cNvPr id="4" name="TextBox 3"/>
+          <p:cNvSpPr txBox="1"/>
+          <p:nvPr/>
+        </p:nvSpPr>
+        <p:spPr>
+          <a:xfrm>
+            <a:off x="457200" y="5623560"/>
+            <a:ext cx="11155680" cy="1005840"/>
+          </a:xfrm>
+          <a:prstGeom prst="rect">
+            <a:avLst/>
+          </a:prstGeom>
+          <a:noFill/>
+        </p:spPr>
+        <p:txBody>
+          <a:bodyPr wrap="square">
+            <a:spAutoFit/>
+          </a:bodyPr>
+          <a:lstStyle/>
+          <a:p>
+            <a:pPr>
+              <a:defRPr sz="1000"/>
+            </a:pPr>
+            <a:r>
+              <a:t>CypherMonkey Labs · © 2026 CypherMonkeyLabs</a:t>
+            </a:r>
+          </a:p>
+          <a:p>
+            <a:r>
+              <a:t>Independent, free, learning-only student project. Respects every company and vendor. Trademarks belong to their owners. Not affiliated or endorsed. Concerns are removed or corrected promptly via the contact form at https</a:t>
+            </a:r>
+          </a:p>
+        </p:txBody>
+      </p:sp>
+      <p:sp>
+        <p:nvSpPr>
+          <p:cNvPr id="5" name="TextBox 4">
+            <a:hlinkClick r:id="rId2"/>
           </p:cNvPr>
           <p:cNvSpPr txBox="1"/>
           <p:nvPr/>
         </p:nvSpPr>
         <p:spPr>
           <a:xfrm>
-            <a:off x="6766560" y="6355080"/>
+            <a:off x="457200" y="6355080"/>
             <a:ext cx="2011680" cy="320040"/>
           </a:xfrm>
           <a:prstGeom prst="rect">
@@ -3335,22 +3454,22 @@
               <a:defRPr sz="1200"/>
             </a:pPr>
             <a:r>
-              <a:t>LinkedIn</a:t>
-            </a:r>
-          </a:p>
-        </p:txBody>
-      </p:sp>
-      <p:sp>
-        <p:nvSpPr>
-          <p:cNvPr id="9" name="TextBox 8">
-            <a:hlinkClick r:id="rId6"/>
+              <a:t>Website</a:t>
+            </a:r>
+          </a:p>
+        </p:txBody>
+      </p:sp>
+      <p:sp>
+        <p:nvSpPr>
+          <p:cNvPr id="6" name="TextBox 5">
+            <a:hlinkClick r:id="rId3"/>
           </p:cNvPr>
           <p:cNvSpPr txBox="1"/>
           <p:nvPr/>
         </p:nvSpPr>
         <p:spPr>
           <a:xfrm>
-            <a:off x="8869680" y="6355080"/>
+            <a:off x="2560320" y="6355080"/>
             <a:ext cx="2011680" cy="320040"/>
           </a:xfrm>
           <a:prstGeom prst="rect">
@@ -3368,7 +3487,40 @@
               <a:defRPr sz="1200"/>
             </a:pPr>
             <a:r>
-              <a:t>Hugging Face</a:t>
+              <a:t>GitHub</a:t>
+            </a:r>
+          </a:p>
+        </p:txBody>
+      </p:sp>
+      <p:sp>
+        <p:nvSpPr>
+          <p:cNvPr id="7" name="TextBox 6">
+            <a:hlinkClick r:id="rId4"/>
+          </p:cNvPr>
+          <p:cNvSpPr txBox="1"/>
+          <p:nvPr/>
+        </p:nvSpPr>
+        <p:spPr>
+          <a:xfrm>
+            <a:off x="4663440" y="6355080"/>
+            <a:ext cx="2011680" cy="320040"/>
+          </a:xfrm>
+          <a:prstGeom prst="rect">
+            <a:avLst/>
+          </a:prstGeom>
+          <a:noFill/>
+        </p:spPr>
+        <p:txBody>
+          <a:bodyPr wrap="none">
+            <a:spAutoFit/>
+          </a:bodyPr>
+          <a:lstStyle/>
+          <a:p>
+            <a:pPr>
+              <a:defRPr sz="1200"/>
+            </a:pPr>
+            <a:r>
+              <a:t>Profile</a:t>
             </a:r>
           </a:p>
         </p:txBody>
@@ -3400,7 +3552,7 @@
         <p:spPr>
           <a:xfrm>
             <a:off x="457200" y="274320"/>
-            <a:ext cx="11155680" cy="731520"/>
+            <a:ext cx="11155680" cy="640080"/>
           </a:xfrm>
           <a:prstGeom prst="rect">
             <a:avLst/>
@@ -3430,8 +3582,8 @@
         </p:nvSpPr>
         <p:spPr>
           <a:xfrm>
-            <a:off x="548640" y="1188720"/>
-            <a:ext cx="10972800" cy="4206240"/>
+            <a:off x="548640" y="1051560"/>
+            <a:ext cx="10972800" cy="4297680"/>
           </a:xfrm>
           <a:prstGeom prst="rect">
             <a:avLst/>
@@ -3500,7 +3652,7 @@
           </a:p>
           <a:p>
             <a:r>
-              <a:t>Independent, free, learning-only student project. Respects every company, tradition, and vendor. Trademarks and sources belong to their owners. Not sold. Concerns are handled by correcting or removing content promptly vi</a:t>
+              <a:t>Independent, free, learning-only student project. Respects every company and vendor. Trademarks belong to their owners. Not affiliated or endorsed. Concerns are removed or corrected promptly via the contact form at https</a:t>
             </a:r>
           </a:p>
         </p:txBody>
@@ -3533,7 +3685,7 @@
               <a:defRPr sz="1200"/>
             </a:pPr>
             <a:r>
-              <a:t>GitHub</a:t>
+              <a:t>Website</a:t>
             </a:r>
           </a:p>
         </p:txBody>
@@ -3566,7 +3718,7 @@
               <a:defRPr sz="1200"/>
             </a:pPr>
             <a:r>
-              <a:t>Website</a:t>
+              <a:t>GitHub</a:t>
             </a:r>
           </a:p>
         </p:txBody>
@@ -3599,73 +3751,7 @@
               <a:defRPr sz="1200"/>
             </a:pPr>
             <a:r>
-              <a:t>X</a:t>
-            </a:r>
-          </a:p>
-        </p:txBody>
-      </p:sp>
-      <p:sp>
-        <p:nvSpPr>
-          <p:cNvPr id="8" name="TextBox 7">
-            <a:hlinkClick r:id="rId5"/>
-          </p:cNvPr>
-          <p:cNvSpPr txBox="1"/>
-          <p:nvPr/>
-        </p:nvSpPr>
-        <p:spPr>
-          <a:xfrm>
-            <a:off x="6766560" y="6355080"/>
-            <a:ext cx="2011680" cy="320040"/>
-          </a:xfrm>
-          <a:prstGeom prst="rect">
-            <a:avLst/>
-          </a:prstGeom>
-          <a:noFill/>
-        </p:spPr>
-        <p:txBody>
-          <a:bodyPr wrap="none">
-            <a:spAutoFit/>
-          </a:bodyPr>
-          <a:lstStyle/>
-          <a:p>
-            <a:pPr>
-              <a:defRPr sz="1200"/>
-            </a:pPr>
-            <a:r>
-              <a:t>LinkedIn</a:t>
-            </a:r>
-          </a:p>
-        </p:txBody>
-      </p:sp>
-      <p:sp>
-        <p:nvSpPr>
-          <p:cNvPr id="9" name="TextBox 8">
-            <a:hlinkClick r:id="rId6"/>
-          </p:cNvPr>
-          <p:cNvSpPr txBox="1"/>
-          <p:nvPr/>
-        </p:nvSpPr>
-        <p:spPr>
-          <a:xfrm>
-            <a:off x="8869680" y="6355080"/>
-            <a:ext cx="2011680" cy="320040"/>
-          </a:xfrm>
-          <a:prstGeom prst="rect">
-            <a:avLst/>
-          </a:prstGeom>
-          <a:noFill/>
-        </p:spPr>
-        <p:txBody>
-          <a:bodyPr wrap="none">
-            <a:spAutoFit/>
-          </a:bodyPr>
-          <a:lstStyle/>
-          <a:p>
-            <a:pPr>
-              <a:defRPr sz="1200"/>
-            </a:pPr>
-            <a:r>
-              <a:t>Hugging Face</a:t>
+              <a:t>Profile</a:t>
             </a:r>
           </a:p>
         </p:txBody>
@@ -3697,7 +3783,7 @@
         <p:spPr>
           <a:xfrm>
             <a:off x="457200" y="274320"/>
-            <a:ext cx="11155680" cy="731520"/>
+            <a:ext cx="11155680" cy="640080"/>
           </a:xfrm>
           <a:prstGeom prst="rect">
             <a:avLst/>
@@ -3727,8 +3813,8 @@
         </p:nvSpPr>
         <p:spPr>
           <a:xfrm>
-            <a:off x="548640" y="1188720"/>
-            <a:ext cx="10972800" cy="4206240"/>
+            <a:off x="548640" y="1051560"/>
+            <a:ext cx="10972800" cy="4297680"/>
           </a:xfrm>
           <a:prstGeom prst="rect">
             <a:avLst/>
@@ -3805,7 +3891,7 @@
           </a:p>
           <a:p>
             <a:r>
-              <a:t>Independent, free, learning-only student project. Respects every company, tradition, and vendor. Trademarks and sources belong to their owners. Not sold. Concerns are handled by correcting or removing content promptly vi</a:t>
+              <a:t>Independent, free, learning-only student project. Respects every company and vendor. Trademarks belong to their owners. Not affiliated or endorsed. Concerns are removed or corrected promptly via the contact form at https</a:t>
             </a:r>
           </a:p>
         </p:txBody>
@@ -3838,7 +3924,7 @@
               <a:defRPr sz="1200"/>
             </a:pPr>
             <a:r>
-              <a:t>GitHub</a:t>
+              <a:t>Website</a:t>
             </a:r>
           </a:p>
         </p:txBody>
@@ -3871,7 +3957,7 @@
               <a:defRPr sz="1200"/>
             </a:pPr>
             <a:r>
-              <a:t>Website</a:t>
+              <a:t>GitHub</a:t>
             </a:r>
           </a:p>
         </p:txBody>
@@ -3904,73 +3990,7 @@
               <a:defRPr sz="1200"/>
             </a:pPr>
             <a:r>
-              <a:t>X</a:t>
-            </a:r>
-          </a:p>
-        </p:txBody>
-      </p:sp>
-      <p:sp>
-        <p:nvSpPr>
-          <p:cNvPr id="8" name="TextBox 7">
-            <a:hlinkClick r:id="rId5"/>
-          </p:cNvPr>
-          <p:cNvSpPr txBox="1"/>
-          <p:nvPr/>
-        </p:nvSpPr>
-        <p:spPr>
-          <a:xfrm>
-            <a:off x="6766560" y="6355080"/>
-            <a:ext cx="2011680" cy="320040"/>
-          </a:xfrm>
-          <a:prstGeom prst="rect">
-            <a:avLst/>
-          </a:prstGeom>
-          <a:noFill/>
-        </p:spPr>
-        <p:txBody>
-          <a:bodyPr wrap="none">
-            <a:spAutoFit/>
-          </a:bodyPr>
-          <a:lstStyle/>
-          <a:p>
-            <a:pPr>
-              <a:defRPr sz="1200"/>
-            </a:pPr>
-            <a:r>
-              <a:t>LinkedIn</a:t>
-            </a:r>
-          </a:p>
-        </p:txBody>
-      </p:sp>
-      <p:sp>
-        <p:nvSpPr>
-          <p:cNvPr id="9" name="TextBox 8">
-            <a:hlinkClick r:id="rId6"/>
-          </p:cNvPr>
-          <p:cNvSpPr txBox="1"/>
-          <p:nvPr/>
-        </p:nvSpPr>
-        <p:spPr>
-          <a:xfrm>
-            <a:off x="8869680" y="6355080"/>
-            <a:ext cx="2011680" cy="320040"/>
-          </a:xfrm>
-          <a:prstGeom prst="rect">
-            <a:avLst/>
-          </a:prstGeom>
-          <a:noFill/>
-        </p:spPr>
-        <p:txBody>
-          <a:bodyPr wrap="none">
-            <a:spAutoFit/>
-          </a:bodyPr>
-          <a:lstStyle/>
-          <a:p>
-            <a:pPr>
-              <a:defRPr sz="1200"/>
-            </a:pPr>
-            <a:r>
-              <a:t>Hugging Face</a:t>
+              <a:t>Profile</a:t>
             </a:r>
           </a:p>
         </p:txBody>
@@ -4002,7 +4022,7 @@
         <p:spPr>
           <a:xfrm>
             <a:off x="457200" y="274320"/>
-            <a:ext cx="11155680" cy="731520"/>
+            <a:ext cx="11155680" cy="640080"/>
           </a:xfrm>
           <a:prstGeom prst="rect">
             <a:avLst/>
@@ -4032,8 +4052,8 @@
         </p:nvSpPr>
         <p:spPr>
           <a:xfrm>
-            <a:off x="548640" y="1188720"/>
-            <a:ext cx="10972800" cy="4206240"/>
+            <a:off x="548640" y="1051560"/>
+            <a:ext cx="10972800" cy="4297680"/>
           </a:xfrm>
           <a:prstGeom prst="rect">
             <a:avLst/>
@@ -4102,7 +4122,7 @@
           </a:p>
           <a:p>
             <a:r>
-              <a:t>Independent, free, learning-only student project. Respects every company, tradition, and vendor. Trademarks and sources belong to their owners. Not sold. Concerns are handled by correcting or removing content promptly vi</a:t>
+              <a:t>Independent, free, learning-only student project. Respects every company and vendor. Trademarks belong to their owners. Not affiliated or endorsed. Concerns are removed or corrected promptly via the contact form at https</a:t>
             </a:r>
           </a:p>
         </p:txBody>
@@ -4135,7 +4155,7 @@
               <a:defRPr sz="1200"/>
             </a:pPr>
             <a:r>
-              <a:t>GitHub</a:t>
+              <a:t>Website</a:t>
             </a:r>
           </a:p>
         </p:txBody>
@@ -4168,7 +4188,7 @@
               <a:defRPr sz="1200"/>
             </a:pPr>
             <a:r>
-              <a:t>Website</a:t>
+              <a:t>GitHub</a:t>
             </a:r>
           </a:p>
         </p:txBody>
@@ -4201,73 +4221,7 @@
               <a:defRPr sz="1200"/>
             </a:pPr>
             <a:r>
-              <a:t>X</a:t>
-            </a:r>
-          </a:p>
-        </p:txBody>
-      </p:sp>
-      <p:sp>
-        <p:nvSpPr>
-          <p:cNvPr id="8" name="TextBox 7">
-            <a:hlinkClick r:id="rId5"/>
-          </p:cNvPr>
-          <p:cNvSpPr txBox="1"/>
-          <p:nvPr/>
-        </p:nvSpPr>
-        <p:spPr>
-          <a:xfrm>
-            <a:off x="6766560" y="6355080"/>
-            <a:ext cx="2011680" cy="320040"/>
-          </a:xfrm>
-          <a:prstGeom prst="rect">
-            <a:avLst/>
-          </a:prstGeom>
-          <a:noFill/>
-        </p:spPr>
-        <p:txBody>
-          <a:bodyPr wrap="none">
-            <a:spAutoFit/>
-          </a:bodyPr>
-          <a:lstStyle/>
-          <a:p>
-            <a:pPr>
-              <a:defRPr sz="1200"/>
-            </a:pPr>
-            <a:r>
-              <a:t>LinkedIn</a:t>
-            </a:r>
-          </a:p>
-        </p:txBody>
-      </p:sp>
-      <p:sp>
-        <p:nvSpPr>
-          <p:cNvPr id="9" name="TextBox 8">
-            <a:hlinkClick r:id="rId6"/>
-          </p:cNvPr>
-          <p:cNvSpPr txBox="1"/>
-          <p:nvPr/>
-        </p:nvSpPr>
-        <p:spPr>
-          <a:xfrm>
-            <a:off x="8869680" y="6355080"/>
-            <a:ext cx="2011680" cy="320040"/>
-          </a:xfrm>
-          <a:prstGeom prst="rect">
-            <a:avLst/>
-          </a:prstGeom>
-          <a:noFill/>
-        </p:spPr>
-        <p:txBody>
-          <a:bodyPr wrap="none">
-            <a:spAutoFit/>
-          </a:bodyPr>
-          <a:lstStyle/>
-          <a:p>
-            <a:pPr>
-              <a:defRPr sz="1200"/>
-            </a:pPr>
-            <a:r>
-              <a:t>Hugging Face</a:t>
+              <a:t>Profile</a:t>
             </a:r>
           </a:p>
         </p:txBody>
@@ -4299,7 +4253,7 @@
         <p:spPr>
           <a:xfrm>
             <a:off x="457200" y="274320"/>
-            <a:ext cx="11155680" cy="731520"/>
+            <a:ext cx="11155680" cy="640080"/>
           </a:xfrm>
           <a:prstGeom prst="rect">
             <a:avLst/>
@@ -4329,8 +4283,8 @@
         </p:nvSpPr>
         <p:spPr>
           <a:xfrm>
-            <a:off x="548640" y="1188720"/>
-            <a:ext cx="10972800" cy="4206240"/>
+            <a:off x="548640" y="1051560"/>
+            <a:ext cx="10972800" cy="4297680"/>
           </a:xfrm>
           <a:prstGeom prst="rect">
             <a:avLst/>
@@ -4399,7 +4353,7 @@
           </a:p>
           <a:p>
             <a:r>
-              <a:t>Independent, free, learning-only student project. Respects every company, tradition, and vendor. Trademarks and sources belong to their owners. Not sold. Concerns are handled by correcting or removing content promptly vi</a:t>
+              <a:t>Independent, free, learning-only student project. Respects every company and vendor. Trademarks belong to their owners. Not affiliated or endorsed. Concerns are removed or corrected promptly via the contact form at https</a:t>
             </a:r>
           </a:p>
         </p:txBody>
@@ -4432,7 +4386,7 @@
               <a:defRPr sz="1200"/>
             </a:pPr>
             <a:r>
-              <a:t>GitHub</a:t>
+              <a:t>Website</a:t>
             </a:r>
           </a:p>
         </p:txBody>
@@ -4465,7 +4419,7 @@
               <a:defRPr sz="1200"/>
             </a:pPr>
             <a:r>
-              <a:t>Website</a:t>
+              <a:t>GitHub</a:t>
             </a:r>
           </a:p>
         </p:txBody>
@@ -4498,73 +4452,7 @@
               <a:defRPr sz="1200"/>
             </a:pPr>
             <a:r>
-              <a:t>X</a:t>
-            </a:r>
-          </a:p>
-        </p:txBody>
-      </p:sp>
-      <p:sp>
-        <p:nvSpPr>
-          <p:cNvPr id="8" name="TextBox 7">
-            <a:hlinkClick r:id="rId5"/>
-          </p:cNvPr>
-          <p:cNvSpPr txBox="1"/>
-          <p:nvPr/>
-        </p:nvSpPr>
-        <p:spPr>
-          <a:xfrm>
-            <a:off x="6766560" y="6355080"/>
-            <a:ext cx="2011680" cy="320040"/>
-          </a:xfrm>
-          <a:prstGeom prst="rect">
-            <a:avLst/>
-          </a:prstGeom>
-          <a:noFill/>
-        </p:spPr>
-        <p:txBody>
-          <a:bodyPr wrap="none">
-            <a:spAutoFit/>
-          </a:bodyPr>
-          <a:lstStyle/>
-          <a:p>
-            <a:pPr>
-              <a:defRPr sz="1200"/>
-            </a:pPr>
-            <a:r>
-              <a:t>LinkedIn</a:t>
-            </a:r>
-          </a:p>
-        </p:txBody>
-      </p:sp>
-      <p:sp>
-        <p:nvSpPr>
-          <p:cNvPr id="9" name="TextBox 8">
-            <a:hlinkClick r:id="rId6"/>
-          </p:cNvPr>
-          <p:cNvSpPr txBox="1"/>
-          <p:nvPr/>
-        </p:nvSpPr>
-        <p:spPr>
-          <a:xfrm>
-            <a:off x="8869680" y="6355080"/>
-            <a:ext cx="2011680" cy="320040"/>
-          </a:xfrm>
-          <a:prstGeom prst="rect">
-            <a:avLst/>
-          </a:prstGeom>
-          <a:noFill/>
-        </p:spPr>
-        <p:txBody>
-          <a:bodyPr wrap="none">
-            <a:spAutoFit/>
-          </a:bodyPr>
-          <a:lstStyle/>
-          <a:p>
-            <a:pPr>
-              <a:defRPr sz="1200"/>
-            </a:pPr>
-            <a:r>
-              <a:t>Hugging Face</a:t>
+              <a:t>Profile</a:t>
             </a:r>
           </a:p>
         </p:txBody>
@@ -4596,7 +4484,7 @@
         <p:spPr>
           <a:xfrm>
             <a:off x="457200" y="274320"/>
-            <a:ext cx="11155680" cy="731520"/>
+            <a:ext cx="11155680" cy="640080"/>
           </a:xfrm>
           <a:prstGeom prst="rect">
             <a:avLst/>
@@ -4626,8 +4514,8 @@
         </p:nvSpPr>
         <p:spPr>
           <a:xfrm>
-            <a:off x="548640" y="1188720"/>
-            <a:ext cx="10972800" cy="4206240"/>
+            <a:off x="548640" y="1051560"/>
+            <a:ext cx="10972800" cy="4297680"/>
           </a:xfrm>
           <a:prstGeom prst="rect">
             <a:avLst/>
@@ -4696,7 +4584,7 @@
           </a:p>
           <a:p>
             <a:r>
-              <a:t>Independent, free, learning-only student project. Respects every company, tradition, and vendor. Trademarks and sources belong to their owners. Not sold. Concerns are handled by correcting or removing content promptly vi</a:t>
+              <a:t>Independent, free, learning-only student project. Respects every company and vendor. Trademarks belong to their owners. Not affiliated or endorsed. Concerns are removed or corrected promptly via the contact form at https</a:t>
             </a:r>
           </a:p>
         </p:txBody>
@@ -4729,7 +4617,7 @@
               <a:defRPr sz="1200"/>
             </a:pPr>
             <a:r>
-              <a:t>GitHub</a:t>
+              <a:t>Website</a:t>
             </a:r>
           </a:p>
         </p:txBody>
@@ -4762,7 +4650,7 @@
               <a:defRPr sz="1200"/>
             </a:pPr>
             <a:r>
-              <a:t>Website</a:t>
+              <a:t>GitHub</a:t>
             </a:r>
           </a:p>
         </p:txBody>
@@ -4795,73 +4683,7 @@
               <a:defRPr sz="1200"/>
             </a:pPr>
             <a:r>
-              <a:t>X</a:t>
-            </a:r>
-          </a:p>
-        </p:txBody>
-      </p:sp>
-      <p:sp>
-        <p:nvSpPr>
-          <p:cNvPr id="8" name="TextBox 7">
-            <a:hlinkClick r:id="rId5"/>
-          </p:cNvPr>
-          <p:cNvSpPr txBox="1"/>
-          <p:nvPr/>
-        </p:nvSpPr>
-        <p:spPr>
-          <a:xfrm>
-            <a:off x="6766560" y="6355080"/>
-            <a:ext cx="2011680" cy="320040"/>
-          </a:xfrm>
-          <a:prstGeom prst="rect">
-            <a:avLst/>
-          </a:prstGeom>
-          <a:noFill/>
-        </p:spPr>
-        <p:txBody>
-          <a:bodyPr wrap="none">
-            <a:spAutoFit/>
-          </a:bodyPr>
-          <a:lstStyle/>
-          <a:p>
-            <a:pPr>
-              <a:defRPr sz="1200"/>
-            </a:pPr>
-            <a:r>
-              <a:t>LinkedIn</a:t>
-            </a:r>
-          </a:p>
-        </p:txBody>
-      </p:sp>
-      <p:sp>
-        <p:nvSpPr>
-          <p:cNvPr id="9" name="TextBox 8">
-            <a:hlinkClick r:id="rId6"/>
-          </p:cNvPr>
-          <p:cNvSpPr txBox="1"/>
-          <p:nvPr/>
-        </p:nvSpPr>
-        <p:spPr>
-          <a:xfrm>
-            <a:off x="8869680" y="6355080"/>
-            <a:ext cx="2011680" cy="320040"/>
-          </a:xfrm>
-          <a:prstGeom prst="rect">
-            <a:avLst/>
-          </a:prstGeom>
-          <a:noFill/>
-        </p:spPr>
-        <p:txBody>
-          <a:bodyPr wrap="none">
-            <a:spAutoFit/>
-          </a:bodyPr>
-          <a:lstStyle/>
-          <a:p>
-            <a:pPr>
-              <a:defRPr sz="1200"/>
-            </a:pPr>
-            <a:r>
-              <a:t>Hugging Face</a:t>
+              <a:t>Profile</a:t>
             </a:r>
           </a:p>
         </p:txBody>
@@ -4893,7 +4715,7 @@
         <p:spPr>
           <a:xfrm>
             <a:off x="457200" y="274320"/>
-            <a:ext cx="11155680" cy="731520"/>
+            <a:ext cx="11155680" cy="640080"/>
           </a:xfrm>
           <a:prstGeom prst="rect">
             <a:avLst/>
@@ -4923,8 +4745,8 @@
         </p:nvSpPr>
         <p:spPr>
           <a:xfrm>
-            <a:off x="548640" y="1188720"/>
-            <a:ext cx="10972800" cy="4206240"/>
+            <a:off x="548640" y="1051560"/>
+            <a:ext cx="10972800" cy="4297680"/>
           </a:xfrm>
           <a:prstGeom prst="rect">
             <a:avLst/>
@@ -4993,7 +4815,7 @@
           </a:p>
           <a:p>
             <a:r>
-              <a:t>Independent, free, learning-only student project. Respects every company, tradition, and vendor. Trademarks and sources belong to their owners. Not sold. Concerns are handled by correcting or removing content promptly vi</a:t>
+              <a:t>Independent, free, learning-only student project. Respects every company and vendor. Trademarks belong to their owners. Not affiliated or endorsed. Concerns are removed or corrected promptly via the contact form at https</a:t>
             </a:r>
           </a:p>
         </p:txBody>
@@ -5026,7 +4848,7 @@
               <a:defRPr sz="1200"/>
             </a:pPr>
             <a:r>
-              <a:t>GitHub</a:t>
+              <a:t>Website</a:t>
             </a:r>
           </a:p>
         </p:txBody>
@@ -5059,7 +4881,7 @@
               <a:defRPr sz="1200"/>
             </a:pPr>
             <a:r>
-              <a:t>Website</a:t>
+              <a:t>GitHub</a:t>
             </a:r>
           </a:p>
         </p:txBody>
@@ -5092,22 +4914,186 @@
               <a:defRPr sz="1200"/>
             </a:pPr>
             <a:r>
-              <a:t>X</a:t>
-            </a:r>
-          </a:p>
-        </p:txBody>
-      </p:sp>
-      <p:sp>
-        <p:nvSpPr>
-          <p:cNvPr id="8" name="TextBox 7">
-            <a:hlinkClick r:id="rId5"/>
+              <a:t>Profile</a:t>
+            </a:r>
+          </a:p>
+        </p:txBody>
+      </p:sp>
+    </p:spTree>
+  </p:cSld>
+  <p:clrMapOvr>
+    <a:masterClrMapping/>
+  </p:clrMapOvr>
+</p:sld>
+</file>
+
+<file path=ppt/slides/slide8.xml><?xml version="1.0" encoding="utf-8"?>
+<p:sld xmlns:a="http://schemas.openxmlformats.org/drawingml/2006/main" xmlns:p="http://schemas.openxmlformats.org/presentationml/2006/main" xmlns:r="http://schemas.openxmlformats.org/officeDocument/2006/relationships">
+  <p:cSld>
+    <p:spTree>
+      <p:nvGrpSpPr>
+        <p:cNvPr id="1" name=""/>
+        <p:cNvGrpSpPr/>
+        <p:nvPr/>
+      </p:nvGrpSpPr>
+      <p:grpSpPr/>
+      <p:sp>
+        <p:nvSpPr>
+          <p:cNvPr id="2" name="TextBox 1"/>
+          <p:cNvSpPr txBox="1"/>
+          <p:nvPr/>
+        </p:nvSpPr>
+        <p:spPr>
+          <a:xfrm>
+            <a:off x="457200" y="274320"/>
+            <a:ext cx="11155680" cy="640080"/>
+          </a:xfrm>
+          <a:prstGeom prst="rect">
+            <a:avLst/>
+          </a:prstGeom>
+          <a:noFill/>
+        </p:spPr>
+        <p:txBody>
+          <a:bodyPr wrap="none">
+            <a:spAutoFit/>
+          </a:bodyPr>
+          <a:lstStyle/>
+          <a:p>
+            <a:pPr>
+              <a:defRPr sz="2800" b="1"/>
+            </a:pPr>
+            <a:r>
+              <a:t>Sources and go deeper</a:t>
+            </a:r>
+          </a:p>
+        </p:txBody>
+      </p:sp>
+      <p:sp>
+        <p:nvSpPr>
+          <p:cNvPr id="3" name="TextBox 2"/>
+          <p:cNvSpPr txBox="1"/>
+          <p:nvPr/>
+        </p:nvSpPr>
+        <p:spPr>
+          <a:xfrm>
+            <a:off x="548640" y="1051560"/>
+            <a:ext cx="10972800" cy="4297680"/>
+          </a:xfrm>
+          <a:prstGeom prst="rect">
+            <a:avLst/>
+          </a:prstGeom>
+          <a:noFill/>
+        </p:spPr>
+        <p:txBody>
+          <a:bodyPr wrap="square">
+            <a:spAutoFit/>
+          </a:bodyPr>
+          <a:lstStyle/>
+          <a:p>
+            <a:pPr>
+              <a:defRPr sz="1400"/>
+            </a:pPr>
+            <a:r>
+              <a:t>IIBA KnowledgeHub, including the BABOK Guide contents (standard). https://www.iiba.org/knowledgehub/ last checked 2026-10.</a:t>
+            </a:r>
+          </a:p>
+          <a:p>
+            <a:pPr>
+              <a:defRPr sz="1400"/>
+            </a:pPr>
+            <a:r>
+              <a:t>BABOK Guide article on the IIBA knowledge hub (standard). confirm. last checked 2026-10.</a:t>
+            </a:r>
+          </a:p>
+          <a:p>
+            <a:pPr>
+              <a:defRPr sz="1400"/>
+            </a:pPr>
+            <a:r>
+              <a:t>IIBA home (official). https://www.iiba.org/ last checked 2026-10.</a:t>
+            </a:r>
+          </a:p>
+          <a:p>
+            <a:pPr>
+              <a:defRPr sz="1400"/>
+            </a:pPr>
+            <a:r>
+              <a:t>Manifesto for Agile Software Development (standard). https://agilemanifesto.org/ last checked 2026-10.</a:t>
+            </a:r>
+          </a:p>
+          <a:p>
+            <a:pPr>
+              <a:defRPr sz="1400"/>
+            </a:pPr>
+            <a:r>
+              <a:t>Principles behind the Agile Manifesto (standard). https://agilemanifesto.org/principles.html last checked 2026-10.</a:t>
+            </a:r>
+          </a:p>
+          <a:p>
+            <a:pPr>
+              <a:defRPr sz="1400"/>
+            </a:pPr>
+            <a:r>
+              <a:t>OMG, about BPMN 2.0 (standard). https://www.omg.org/spec/BPMN/2.0/About-BPMN last checked 2026-10.</a:t>
+            </a:r>
+          </a:p>
+          <a:p>
+            <a:pPr>
+              <a:defRPr sz="1400"/>
+            </a:pPr>
+            <a:r>
+              <a:t>BPMN 2.0 specification PDF (standard). https://www.omg.org/spec/BPMN/2.0/PDF last checked 2026-10.</a:t>
+            </a:r>
+          </a:p>
+        </p:txBody>
+      </p:sp>
+      <p:sp>
+        <p:nvSpPr>
+          <p:cNvPr id="4" name="TextBox 3"/>
+          <p:cNvSpPr txBox="1"/>
+          <p:nvPr/>
+        </p:nvSpPr>
+        <p:spPr>
+          <a:xfrm>
+            <a:off x="457200" y="5623560"/>
+            <a:ext cx="11155680" cy="1005840"/>
+          </a:xfrm>
+          <a:prstGeom prst="rect">
+            <a:avLst/>
+          </a:prstGeom>
+          <a:noFill/>
+        </p:spPr>
+        <p:txBody>
+          <a:bodyPr wrap="square">
+            <a:spAutoFit/>
+          </a:bodyPr>
+          <a:lstStyle/>
+          <a:p>
+            <a:pPr>
+              <a:defRPr sz="1000"/>
+            </a:pPr>
+            <a:r>
+              <a:t>CypherMonkey Labs · © 2026 CypherMonkeyLabs</a:t>
+            </a:r>
+          </a:p>
+          <a:p>
+            <a:r>
+              <a:t>Independent, free, learning-only student project. Respects every company and vendor. Trademarks belong to their owners. Not affiliated or endorsed. Concerns are removed or corrected promptly via the contact form at https</a:t>
+            </a:r>
+          </a:p>
+        </p:txBody>
+      </p:sp>
+      <p:sp>
+        <p:nvSpPr>
+          <p:cNvPr id="5" name="TextBox 4">
+            <a:hlinkClick r:id="rId2"/>
           </p:cNvPr>
           <p:cNvSpPr txBox="1"/>
           <p:nvPr/>
         </p:nvSpPr>
         <p:spPr>
           <a:xfrm>
-            <a:off x="6766560" y="6355080"/>
+            <a:off x="457200" y="6355080"/>
             <a:ext cx="2011680" cy="320040"/>
           </a:xfrm>
           <a:prstGeom prst="rect">
@@ -5125,22 +5111,22 @@
               <a:defRPr sz="1200"/>
             </a:pPr>
             <a:r>
-              <a:t>LinkedIn</a:t>
-            </a:r>
-          </a:p>
-        </p:txBody>
-      </p:sp>
-      <p:sp>
-        <p:nvSpPr>
-          <p:cNvPr id="9" name="TextBox 8">
-            <a:hlinkClick r:id="rId6"/>
+              <a:t>Website</a:t>
+            </a:r>
+          </a:p>
+        </p:txBody>
+      </p:sp>
+      <p:sp>
+        <p:nvSpPr>
+          <p:cNvPr id="6" name="TextBox 5">
+            <a:hlinkClick r:id="rId3"/>
           </p:cNvPr>
           <p:cNvSpPr txBox="1"/>
           <p:nvPr/>
         </p:nvSpPr>
         <p:spPr>
           <a:xfrm>
-            <a:off x="8869680" y="6355080"/>
+            <a:off x="2560320" y="6355080"/>
             <a:ext cx="2011680" cy="320040"/>
           </a:xfrm>
           <a:prstGeom prst="rect">
@@ -5158,7 +5144,303 @@
               <a:defRPr sz="1200"/>
             </a:pPr>
             <a:r>
-              <a:t>Hugging Face</a:t>
+              <a:t>GitHub</a:t>
+            </a:r>
+          </a:p>
+        </p:txBody>
+      </p:sp>
+      <p:sp>
+        <p:nvSpPr>
+          <p:cNvPr id="7" name="TextBox 6">
+            <a:hlinkClick r:id="rId4"/>
+          </p:cNvPr>
+          <p:cNvSpPr txBox="1"/>
+          <p:nvPr/>
+        </p:nvSpPr>
+        <p:spPr>
+          <a:xfrm>
+            <a:off x="4663440" y="6355080"/>
+            <a:ext cx="2011680" cy="320040"/>
+          </a:xfrm>
+          <a:prstGeom prst="rect">
+            <a:avLst/>
+          </a:prstGeom>
+          <a:noFill/>
+        </p:spPr>
+        <p:txBody>
+          <a:bodyPr wrap="none">
+            <a:spAutoFit/>
+          </a:bodyPr>
+          <a:lstStyle/>
+          <a:p>
+            <a:pPr>
+              <a:defRPr sz="1200"/>
+            </a:pPr>
+            <a:r>
+              <a:t>Profile</a:t>
+            </a:r>
+          </a:p>
+        </p:txBody>
+      </p:sp>
+    </p:spTree>
+  </p:cSld>
+  <p:clrMapOvr>
+    <a:masterClrMapping/>
+  </p:clrMapOvr>
+</p:sld>
+</file>
+
+<file path=ppt/slides/slide9.xml><?xml version="1.0" encoding="utf-8"?>
+<p:sld xmlns:a="http://schemas.openxmlformats.org/drawingml/2006/main" xmlns:p="http://schemas.openxmlformats.org/presentationml/2006/main" xmlns:r="http://schemas.openxmlformats.org/officeDocument/2006/relationships">
+  <p:cSld>
+    <p:spTree>
+      <p:nvGrpSpPr>
+        <p:cNvPr id="1" name=""/>
+        <p:cNvGrpSpPr/>
+        <p:nvPr/>
+      </p:nvGrpSpPr>
+      <p:grpSpPr/>
+      <p:sp>
+        <p:nvSpPr>
+          <p:cNvPr id="2" name="TextBox 1"/>
+          <p:cNvSpPr txBox="1"/>
+          <p:nvPr/>
+        </p:nvSpPr>
+        <p:spPr>
+          <a:xfrm>
+            <a:off x="457200" y="274320"/>
+            <a:ext cx="11155680" cy="640080"/>
+          </a:xfrm>
+          <a:prstGeom prst="rect">
+            <a:avLst/>
+          </a:prstGeom>
+          <a:noFill/>
+        </p:spPr>
+        <p:txBody>
+          <a:bodyPr wrap="none">
+            <a:spAutoFit/>
+          </a:bodyPr>
+          <a:lstStyle/>
+          <a:p>
+            <a:pPr>
+              <a:defRPr sz="2800" b="1"/>
+            </a:pPr>
+            <a:r>
+              <a:t>Sources and go deeper, continued</a:t>
+            </a:r>
+          </a:p>
+        </p:txBody>
+      </p:sp>
+      <p:sp>
+        <p:nvSpPr>
+          <p:cNvPr id="3" name="TextBox 2"/>
+          <p:cNvSpPr txBox="1"/>
+          <p:nvPr/>
+        </p:nvSpPr>
+        <p:spPr>
+          <a:xfrm>
+            <a:off x="548640" y="1051560"/>
+            <a:ext cx="10972800" cy="4297680"/>
+          </a:xfrm>
+          <a:prstGeom prst="rect">
+            <a:avLst/>
+          </a:prstGeom>
+          <a:noFill/>
+        </p:spPr>
+        <p:txBody>
+          <a:bodyPr wrap="square">
+            <a:spAutoFit/>
+          </a:bodyPr>
+          <a:lstStyle/>
+          <a:p>
+            <a:pPr>
+              <a:defRPr sz="1400"/>
+            </a:pPr>
+            <a:r>
+              <a:t>OMG, about BPMN 2.0.2 (standard). https://www.omg.org/spec/BPMN/2.0.2/About-BPMN last checked 2026-10.</a:t>
+            </a:r>
+          </a:p>
+          <a:p>
+            <a:pPr>
+              <a:defRPr sz="1400"/>
+            </a:pPr>
+            <a:r>
+              <a:t>OMG, about UML 2.5.1 (standard). https://www.omg.org/spec/UML/2.5.1/About-UML last checked 2026-10.</a:t>
+            </a:r>
+          </a:p>
+          <a:p>
+            <a:pPr>
+              <a:defRPr sz="1400"/>
+            </a:pPr>
+            <a:r>
+              <a:t>UML 2.5.1 specification PDF (standard). https://www.omg.org/spec/UML/2.5.1/PDF last checked 2026-10.</a:t>
+            </a:r>
+          </a:p>
+          <a:p>
+            <a:pPr>
+              <a:defRPr sz="1400"/>
+            </a:pPr>
+            <a:r>
+              <a:t>IIBA membership (community). https://www.iiba.org/membership/ last checked 2026-10.</a:t>
+            </a:r>
+          </a:p>
+          <a:p>
+            <a:pPr>
+              <a:defRPr sz="1400"/>
+            </a:pPr>
+            <a:r>
+              <a:t>OMG managed communities (community). https://www.omg.org/communities/ last checked 2026-10.</a:t>
+            </a:r>
+          </a:p>
+          <a:p>
+            <a:pPr>
+              <a:defRPr sz="1400"/>
+            </a:pPr>
+            <a:r>
+              <a:t>About IIBA (official). https://www.iiba.org/about-iiba/ last checked 2026-10.</a:t>
+            </a:r>
+          </a:p>
+          <a:p>
+            <a:pPr>
+              <a:defRPr sz="1400"/>
+            </a:pPr>
+            <a:r>
+              <a:t>WCAG 2.2 recommendation (standard). https://www.w3.org/TR/WCAG22/ last checked 2026-10.</a:t>
+            </a:r>
+          </a:p>
+        </p:txBody>
+      </p:sp>
+      <p:sp>
+        <p:nvSpPr>
+          <p:cNvPr id="4" name="TextBox 3"/>
+          <p:cNvSpPr txBox="1"/>
+          <p:nvPr/>
+        </p:nvSpPr>
+        <p:spPr>
+          <a:xfrm>
+            <a:off x="457200" y="5623560"/>
+            <a:ext cx="11155680" cy="1005840"/>
+          </a:xfrm>
+          <a:prstGeom prst="rect">
+            <a:avLst/>
+          </a:prstGeom>
+          <a:noFill/>
+        </p:spPr>
+        <p:txBody>
+          <a:bodyPr wrap="square">
+            <a:spAutoFit/>
+          </a:bodyPr>
+          <a:lstStyle/>
+          <a:p>
+            <a:pPr>
+              <a:defRPr sz="1000"/>
+            </a:pPr>
+            <a:r>
+              <a:t>CypherMonkey Labs · © 2026 CypherMonkeyLabs</a:t>
+            </a:r>
+          </a:p>
+          <a:p>
+            <a:r>
+              <a:t>Independent, free, learning-only student project. Respects every company and vendor. Trademarks belong to their owners. Not affiliated or endorsed. Concerns are removed or corrected promptly via the contact form at https</a:t>
+            </a:r>
+          </a:p>
+        </p:txBody>
+      </p:sp>
+      <p:sp>
+        <p:nvSpPr>
+          <p:cNvPr id="5" name="TextBox 4">
+            <a:hlinkClick r:id="rId2"/>
+          </p:cNvPr>
+          <p:cNvSpPr txBox="1"/>
+          <p:nvPr/>
+        </p:nvSpPr>
+        <p:spPr>
+          <a:xfrm>
+            <a:off x="457200" y="6355080"/>
+            <a:ext cx="2011680" cy="320040"/>
+          </a:xfrm>
+          <a:prstGeom prst="rect">
+            <a:avLst/>
+          </a:prstGeom>
+          <a:noFill/>
+        </p:spPr>
+        <p:txBody>
+          <a:bodyPr wrap="none">
+            <a:spAutoFit/>
+          </a:bodyPr>
+          <a:lstStyle/>
+          <a:p>
+            <a:pPr>
+              <a:defRPr sz="1200"/>
+            </a:pPr>
+            <a:r>
+              <a:t>Website</a:t>
+            </a:r>
+          </a:p>
+        </p:txBody>
+      </p:sp>
+      <p:sp>
+        <p:nvSpPr>
+          <p:cNvPr id="6" name="TextBox 5">
+            <a:hlinkClick r:id="rId3"/>
+          </p:cNvPr>
+          <p:cNvSpPr txBox="1"/>
+          <p:nvPr/>
+        </p:nvSpPr>
+        <p:spPr>
+          <a:xfrm>
+            <a:off x="2560320" y="6355080"/>
+            <a:ext cx="2011680" cy="320040"/>
+          </a:xfrm>
+          <a:prstGeom prst="rect">
+            <a:avLst/>
+          </a:prstGeom>
+          <a:noFill/>
+        </p:spPr>
+        <p:txBody>
+          <a:bodyPr wrap="none">
+            <a:spAutoFit/>
+          </a:bodyPr>
+          <a:lstStyle/>
+          <a:p>
+            <a:pPr>
+              <a:defRPr sz="1200"/>
+            </a:pPr>
+            <a:r>
+              <a:t>GitHub</a:t>
+            </a:r>
+          </a:p>
+        </p:txBody>
+      </p:sp>
+      <p:sp>
+        <p:nvSpPr>
+          <p:cNvPr id="7" name="TextBox 6">
+            <a:hlinkClick r:id="rId4"/>
+          </p:cNvPr>
+          <p:cNvSpPr txBox="1"/>
+          <p:nvPr/>
+        </p:nvSpPr>
+        <p:spPr>
+          <a:xfrm>
+            <a:off x="4663440" y="6355080"/>
+            <a:ext cx="2011680" cy="320040"/>
+          </a:xfrm>
+          <a:prstGeom prst="rect">
+            <a:avLst/>
+          </a:prstGeom>
+          <a:noFill/>
+        </p:spPr>
+        <p:txBody>
+          <a:bodyPr wrap="none">
+            <a:spAutoFit/>
+          </a:bodyPr>
+          <a:lstStyle/>
+          <a:p>
+            <a:pPr>
+              <a:defRPr sz="1200"/>
+            </a:pPr>
+            <a:r>
+              <a:t>Profile</a:t>
             </a:r>
           </a:p>
         </p:txBody>

--- a/downloads/ba-study-deck.pptx
+++ b/downloads/ba-study-deck.pptx
@@ -3206,7 +3206,7 @@
           </a:p>
           <a:p>
             <a:r>
-              <a:t>Independent, free, learning-only student project. Respects every company and vendor. Trademarks belong to their owners. Not affiliated or endorsed. Concerns are removed or corrected promptly via the contact form at https</a:t>
+              <a:t>Independent, free, learning-only student project. Respects every company and vendor. Trademarks belong to their owners. Not affiliated or endorsed. Names in the contact-center rooms are citations of pages opened in Octob</a:t>
             </a:r>
           </a:p>
         </p:txBody>
@@ -3388,6 +3388,30 @@
               <a:t>How to Meet WCAG, quick reference (official). https://www.w3.org/WAI/WCAG22/quickref/ last checked 2026-10.</a:t>
             </a:r>
           </a:p>
+          <a:p>
+            <a:pPr>
+              <a:defRPr sz="1400"/>
+            </a:pPr>
+            <a:r>
+              <a:t>Connect Customer feature overview (official). https://docs.aws.amazon.com/connect/latest/adminguide/connect-feature-overview.html last checked 2026-10.</a:t>
+            </a:r>
+          </a:p>
+          <a:p>
+            <a:pPr>
+              <a:defRPr sz="1400"/>
+            </a:pPr>
+            <a:r>
+              <a:t>Connect Customer metric definitions (official). https://docs.aws.amazon.com/connect/latest/adminguide/metrics-definitions.html last checked 2026-10.</a:t>
+            </a:r>
+          </a:p>
+          <a:p>
+            <a:pPr>
+              <a:defRPr sz="1400"/>
+            </a:pPr>
+            <a:r>
+              <a:t>AWS Prescriptive Guidance, project phases and workstreams (official). https://docs.aws.amazon.com/prescriptive-guidance/latest/strategy-migration-connect/workstreams.html last checked 2026-10.</a:t>
+            </a:r>
+          </a:p>
         </p:txBody>
       </p:sp>
       <p:sp>
@@ -3421,7 +3445,7 @@
           </a:p>
           <a:p>
             <a:r>
-              <a:t>Independent, free, learning-only student project. Respects every company and vendor. Trademarks belong to their owners. Not affiliated or endorsed. Concerns are removed or corrected promptly via the contact form at https</a:t>
+              <a:t>Independent, free, learning-only student project. Respects every company and vendor. Trademarks belong to their owners. Not affiliated or endorsed. Names in the contact-center rooms are citations of pages opened in Octob</a:t>
             </a:r>
           </a:p>
         </p:txBody>
@@ -3652,7 +3676,7 @@
           </a:p>
           <a:p>
             <a:r>
-              <a:t>Independent, free, learning-only student project. Respects every company and vendor. Trademarks belong to their owners. Not affiliated or endorsed. Concerns are removed or corrected promptly via the contact form at https</a:t>
+              <a:t>Independent, free, learning-only student project. Respects every company and vendor. Trademarks belong to their owners. Not affiliated or endorsed. Names in the contact-center rooms are citations of pages opened in Octob</a:t>
             </a:r>
           </a:p>
         </p:txBody>
@@ -3891,7 +3915,7 @@
           </a:p>
           <a:p>
             <a:r>
-              <a:t>Independent, free, learning-only student project. Respects every company and vendor. Trademarks belong to their owners. Not affiliated or endorsed. Concerns are removed or corrected promptly via the contact form at https</a:t>
+              <a:t>Independent, free, learning-only student project. Respects every company and vendor. Trademarks belong to their owners. Not affiliated or endorsed. Names in the contact-center rooms are citations of pages opened in Octob</a:t>
             </a:r>
           </a:p>
         </p:txBody>
@@ -4122,7 +4146,7 @@
           </a:p>
           <a:p>
             <a:r>
-              <a:t>Independent, free, learning-only student project. Respects every company and vendor. Trademarks belong to their owners. Not affiliated or endorsed. Concerns are removed or corrected promptly via the contact form at https</a:t>
+              <a:t>Independent, free, learning-only student project. Respects every company and vendor. Trademarks belong to their owners. Not affiliated or endorsed. Names in the contact-center rooms are citations of pages opened in Octob</a:t>
             </a:r>
           </a:p>
         </p:txBody>
@@ -4353,7 +4377,7 @@
           </a:p>
           <a:p>
             <a:r>
-              <a:t>Independent, free, learning-only student project. Respects every company and vendor. Trademarks belong to their owners. Not affiliated or endorsed. Concerns are removed or corrected promptly via the contact form at https</a:t>
+              <a:t>Independent, free, learning-only student project. Respects every company and vendor. Trademarks belong to their owners. Not affiliated or endorsed. Names in the contact-center rooms are citations of pages opened in Octob</a:t>
             </a:r>
           </a:p>
         </p:txBody>
@@ -4584,7 +4608,7 @@
           </a:p>
           <a:p>
             <a:r>
-              <a:t>Independent, free, learning-only student project. Respects every company and vendor. Trademarks belong to their owners. Not affiliated or endorsed. Concerns are removed or corrected promptly via the contact form at https</a:t>
+              <a:t>Independent, free, learning-only student project. Respects every company and vendor. Trademarks belong to their owners. Not affiliated or endorsed. Names in the contact-center rooms are citations of pages opened in Octob</a:t>
             </a:r>
           </a:p>
         </p:txBody>
@@ -4815,7 +4839,7 @@
           </a:p>
           <a:p>
             <a:r>
-              <a:t>Independent, free, learning-only student project. Respects every company and vendor. Trademarks belong to their owners. Not affiliated or endorsed. Concerns are removed or corrected promptly via the contact form at https</a:t>
+              <a:t>Independent, free, learning-only student project. Respects every company and vendor. Trademarks belong to their owners. Not affiliated or endorsed. Names in the contact-center rooms are citations of pages opened in Octob</a:t>
             </a:r>
           </a:p>
         </p:txBody>
@@ -5078,7 +5102,7 @@
           </a:p>
           <a:p>
             <a:r>
-              <a:t>Independent, free, learning-only student project. Respects every company and vendor. Trademarks belong to their owners. Not affiliated or endorsed. Concerns are removed or corrected promptly via the contact form at https</a:t>
+              <a:t>Independent, free, learning-only student project. Respects every company and vendor. Trademarks belong to their owners. Not affiliated or endorsed. Names in the contact-center rooms are citations of pages opened in Octob</a:t>
             </a:r>
           </a:p>
         </p:txBody>
@@ -5341,7 +5365,7 @@
           </a:p>
           <a:p>
             <a:r>
-              <a:t>Independent, free, learning-only student project. Respects every company and vendor. Trademarks belong to their owners. Not affiliated or endorsed. Concerns are removed or corrected promptly via the contact form at https</a:t>
+              <a:t>Independent, free, learning-only student project. Respects every company and vendor. Trademarks belong to their owners. Not affiliated or endorsed. Names in the contact-center rooms are citations of pages opened in Octob</a:t>
             </a:r>
           </a:p>
         </p:txBody>
